--- a/architecture.pptx
+++ b/architecture.pptx
@@ -104,6 +104,11 @@
       </a:defRPr>
     </a:lvl9pPr>
   </p:defaultTextStyle>
+  <p:extLst>
+    <p:ext uri="{EFAFB233-063F-42B5-8137-9DF3F51BA10A}">
+      <p15:sldGuideLst xmlns:p15="http://schemas.microsoft.com/office/powerpoint/2012/main"/>
+    </p:ext>
+  </p:extLst>
 </p:presentation>
 </file>
 
@@ -5793,8 +5798,8 @@
         </p:nvSpPr>
         <p:spPr>
           <a:xfrm>
-            <a:off x="10327477" y="1955957"/>
-            <a:ext cx="1433352" cy="307777"/>
+            <a:off x="10310482" y="1967548"/>
+            <a:ext cx="1509005" cy="307777"/>
           </a:xfrm>
           <a:prstGeom prst="rect">
             <a:avLst/>
@@ -5813,7 +5818,7 @@
                 <a:latin typeface="Arial" panose="020B0604020202020204" pitchFamily="34" charset="0"/>
                 <a:cs typeface="Arial" panose="020B0604020202020204" pitchFamily="34" charset="0"/>
               </a:rPr>
-              <a:t>2 stacks layers</a:t>
+              <a:t>2 stacked layers</a:t>
             </a:r>
           </a:p>
         </p:txBody>

--- a/architecture.pptx
+++ b/architecture.pptx
@@ -2,18 +2,18 @@
 <file path=ppt/presentation.xml><?xml version="1.0" encoding="utf-8"?>
 <p:presentation xmlns:a="http://schemas.openxmlformats.org/drawingml/2006/main" xmlns:r="http://schemas.openxmlformats.org/officeDocument/2006/relationships" xmlns:p="http://schemas.openxmlformats.org/presentationml/2006/main" saveSubsetFonts="1">
   <p:sldMasterIdLst>
-    <p:sldMasterId id="2147483648" r:id="rId1"/>
+    <p:sldMasterId id="2147483672" r:id="rId1"/>
   </p:sldMasterIdLst>
   <p:sldIdLst>
     <p:sldId id="256" r:id="rId2"/>
   </p:sldIdLst>
-  <p:sldSz cx="12192000" cy="6858000"/>
+  <p:sldSz cx="12192000" cy="4114800"/>
   <p:notesSz cx="6858000" cy="9144000"/>
   <p:defaultTextStyle>
     <a:defPPr>
       <a:defRPr lang="en-US"/>
     </a:defPPr>
-    <a:lvl1pPr marL="0" algn="l" defTabSz="914400" rtl="0" eaLnBrk="1" latinLnBrk="0" hangingPunct="1">
+    <a:lvl1pPr marL="0" algn="l" defTabSz="457200" rtl="0" eaLnBrk="1" latinLnBrk="0" hangingPunct="1">
       <a:defRPr sz="1800" kern="1200">
         <a:solidFill>
           <a:schemeClr val="tx1"/>
@@ -23,7 +23,7 @@
         <a:cs typeface="+mn-cs"/>
       </a:defRPr>
     </a:lvl1pPr>
-    <a:lvl2pPr marL="457200" algn="l" defTabSz="914400" rtl="0" eaLnBrk="1" latinLnBrk="0" hangingPunct="1">
+    <a:lvl2pPr marL="457200" algn="l" defTabSz="457200" rtl="0" eaLnBrk="1" latinLnBrk="0" hangingPunct="1">
       <a:defRPr sz="1800" kern="1200">
         <a:solidFill>
           <a:schemeClr val="tx1"/>
@@ -33,7 +33,7 @@
         <a:cs typeface="+mn-cs"/>
       </a:defRPr>
     </a:lvl2pPr>
-    <a:lvl3pPr marL="914400" algn="l" defTabSz="914400" rtl="0" eaLnBrk="1" latinLnBrk="0" hangingPunct="1">
+    <a:lvl3pPr marL="914400" algn="l" defTabSz="457200" rtl="0" eaLnBrk="1" latinLnBrk="0" hangingPunct="1">
       <a:defRPr sz="1800" kern="1200">
         <a:solidFill>
           <a:schemeClr val="tx1"/>
@@ -43,7 +43,7 @@
         <a:cs typeface="+mn-cs"/>
       </a:defRPr>
     </a:lvl3pPr>
-    <a:lvl4pPr marL="1371600" algn="l" defTabSz="914400" rtl="0" eaLnBrk="1" latinLnBrk="0" hangingPunct="1">
+    <a:lvl4pPr marL="1371600" algn="l" defTabSz="457200" rtl="0" eaLnBrk="1" latinLnBrk="0" hangingPunct="1">
       <a:defRPr sz="1800" kern="1200">
         <a:solidFill>
           <a:schemeClr val="tx1"/>
@@ -53,7 +53,7 @@
         <a:cs typeface="+mn-cs"/>
       </a:defRPr>
     </a:lvl4pPr>
-    <a:lvl5pPr marL="1828800" algn="l" defTabSz="914400" rtl="0" eaLnBrk="1" latinLnBrk="0" hangingPunct="1">
+    <a:lvl5pPr marL="1828800" algn="l" defTabSz="457200" rtl="0" eaLnBrk="1" latinLnBrk="0" hangingPunct="1">
       <a:defRPr sz="1800" kern="1200">
         <a:solidFill>
           <a:schemeClr val="tx1"/>
@@ -63,7 +63,7 @@
         <a:cs typeface="+mn-cs"/>
       </a:defRPr>
     </a:lvl5pPr>
-    <a:lvl6pPr marL="2286000" algn="l" defTabSz="914400" rtl="0" eaLnBrk="1" latinLnBrk="0" hangingPunct="1">
+    <a:lvl6pPr marL="2286000" algn="l" defTabSz="457200" rtl="0" eaLnBrk="1" latinLnBrk="0" hangingPunct="1">
       <a:defRPr sz="1800" kern="1200">
         <a:solidFill>
           <a:schemeClr val="tx1"/>
@@ -73,7 +73,7 @@
         <a:cs typeface="+mn-cs"/>
       </a:defRPr>
     </a:lvl6pPr>
-    <a:lvl7pPr marL="2743200" algn="l" defTabSz="914400" rtl="0" eaLnBrk="1" latinLnBrk="0" hangingPunct="1">
+    <a:lvl7pPr marL="2743200" algn="l" defTabSz="457200" rtl="0" eaLnBrk="1" latinLnBrk="0" hangingPunct="1">
       <a:defRPr sz="1800" kern="1200">
         <a:solidFill>
           <a:schemeClr val="tx1"/>
@@ -83,7 +83,7 @@
         <a:cs typeface="+mn-cs"/>
       </a:defRPr>
     </a:lvl7pPr>
-    <a:lvl8pPr marL="3200400" algn="l" defTabSz="914400" rtl="0" eaLnBrk="1" latinLnBrk="0" hangingPunct="1">
+    <a:lvl8pPr marL="3200400" algn="l" defTabSz="457200" rtl="0" eaLnBrk="1" latinLnBrk="0" hangingPunct="1">
       <a:defRPr sz="1800" kern="1200">
         <a:solidFill>
           <a:schemeClr val="tx1"/>
@@ -93,7 +93,7 @@
         <a:cs typeface="+mn-cs"/>
       </a:defRPr>
     </a:lvl8pPr>
-    <a:lvl9pPr marL="3657600" algn="l" defTabSz="914400" rtl="0" eaLnBrk="1" latinLnBrk="0" hangingPunct="1">
+    <a:lvl9pPr marL="3657600" algn="l" defTabSz="457200" rtl="0" eaLnBrk="1" latinLnBrk="0" hangingPunct="1">
       <a:defRPr sz="1800" kern="1200">
         <a:solidFill>
           <a:schemeClr val="tx1"/>
@@ -131,13 +131,7 @@
       </p:grpSpPr>
       <p:sp>
         <p:nvSpPr>
-          <p:cNvPr id="2" name="Title 1">
-            <a:extLst>
-              <a:ext uri="{FF2B5EF4-FFF2-40B4-BE49-F238E27FC236}">
-                <a16:creationId xmlns:a16="http://schemas.microsoft.com/office/drawing/2014/main" id="{0B7F7669-9E7C-0692-54DF-071427FDC21B}"/>
-              </a:ext>
-            </a:extLst>
-          </p:cNvPr>
+          <p:cNvPr id="2" name="Title 1"/>
           <p:cNvSpPr>
             <a:spLocks noGrp="1"/>
           </p:cNvSpPr>
@@ -147,15 +141,15 @@
         </p:nvSpPr>
         <p:spPr>
           <a:xfrm>
-            <a:off x="1524000" y="1122363"/>
-            <a:ext cx="9144000" cy="2387600"/>
+            <a:off x="1524000" y="673418"/>
+            <a:ext cx="9144000" cy="1432560"/>
           </a:xfrm>
         </p:spPr>
         <p:txBody>
           <a:bodyPr anchor="b"/>
           <a:lstStyle>
             <a:lvl1pPr algn="ctr">
-              <a:defRPr sz="6000"/>
+              <a:defRPr sz="3600"/>
             </a:lvl1pPr>
           </a:lstStyle>
           <a:p>
@@ -163,18 +157,13 @@
               <a:rPr lang="en-US"/>
               <a:t>Click to edit Master title style</a:t>
             </a:r>
-          </a:p>
-        </p:txBody>
-      </p:sp>
-      <p:sp>
-        <p:nvSpPr>
-          <p:cNvPr id="3" name="Subtitle 2">
-            <a:extLst>
-              <a:ext uri="{FF2B5EF4-FFF2-40B4-BE49-F238E27FC236}">
-                <a16:creationId xmlns:a16="http://schemas.microsoft.com/office/drawing/2014/main" id="{EFF43B9C-47A0-8FBC-54A3-E809EE03D2DA}"/>
-              </a:ext>
-            </a:extLst>
-          </p:cNvPr>
+            <a:endParaRPr lang="en-US" dirty="0"/>
+          </a:p>
+        </p:txBody>
+      </p:sp>
+      <p:sp>
+        <p:nvSpPr>
+          <p:cNvPr id="3" name="Subtitle 2"/>
           <p:cNvSpPr>
             <a:spLocks noGrp="1"/>
           </p:cNvSpPr>
@@ -184,8 +173,8 @@
         </p:nvSpPr>
         <p:spPr>
           <a:xfrm>
-            <a:off x="1524000" y="3602038"/>
-            <a:ext cx="9144000" cy="1655762"/>
+            <a:off x="1524000" y="2161223"/>
+            <a:ext cx="9144000" cy="993457"/>
           </a:xfrm>
         </p:spPr>
         <p:txBody>
@@ -193,39 +182,39 @@
           <a:lstStyle>
             <a:lvl1pPr marL="0" indent="0" algn="ctr">
               <a:buNone/>
-              <a:defRPr sz="2400"/>
+              <a:defRPr sz="1440"/>
             </a:lvl1pPr>
-            <a:lvl2pPr marL="457200" indent="0" algn="ctr">
-              <a:buNone/>
-              <a:defRPr sz="2000"/>
+            <a:lvl2pPr marL="274320" indent="0" algn="ctr">
+              <a:buNone/>
+              <a:defRPr sz="1200"/>
             </a:lvl2pPr>
-            <a:lvl3pPr marL="914400" indent="0" algn="ctr">
-              <a:buNone/>
-              <a:defRPr sz="1800"/>
+            <a:lvl3pPr marL="548640" indent="0" algn="ctr">
+              <a:buNone/>
+              <a:defRPr sz="1080"/>
             </a:lvl3pPr>
-            <a:lvl4pPr marL="1371600" indent="0" algn="ctr">
-              <a:buNone/>
-              <a:defRPr sz="1600"/>
+            <a:lvl4pPr marL="822960" indent="0" algn="ctr">
+              <a:buNone/>
+              <a:defRPr sz="960"/>
             </a:lvl4pPr>
-            <a:lvl5pPr marL="1828800" indent="0" algn="ctr">
-              <a:buNone/>
-              <a:defRPr sz="1600"/>
+            <a:lvl5pPr marL="1097280" indent="0" algn="ctr">
+              <a:buNone/>
+              <a:defRPr sz="960"/>
             </a:lvl5pPr>
-            <a:lvl6pPr marL="2286000" indent="0" algn="ctr">
-              <a:buNone/>
-              <a:defRPr sz="1600"/>
+            <a:lvl6pPr marL="1371600" indent="0" algn="ctr">
+              <a:buNone/>
+              <a:defRPr sz="960"/>
             </a:lvl6pPr>
-            <a:lvl7pPr marL="2743200" indent="0" algn="ctr">
-              <a:buNone/>
-              <a:defRPr sz="1600"/>
+            <a:lvl7pPr marL="1645920" indent="0" algn="ctr">
+              <a:buNone/>
+              <a:defRPr sz="960"/>
             </a:lvl7pPr>
-            <a:lvl8pPr marL="3200400" indent="0" algn="ctr">
-              <a:buNone/>
-              <a:defRPr sz="1600"/>
+            <a:lvl8pPr marL="1920240" indent="0" algn="ctr">
+              <a:buNone/>
+              <a:defRPr sz="960"/>
             </a:lvl8pPr>
-            <a:lvl9pPr marL="3657600" indent="0" algn="ctr">
-              <a:buNone/>
-              <a:defRPr sz="1600"/>
+            <a:lvl9pPr marL="2194560" indent="0" algn="ctr">
+              <a:buNone/>
+              <a:defRPr sz="960"/>
             </a:lvl9pPr>
           </a:lstStyle>
           <a:p>
@@ -233,18 +222,13 @@
               <a:rPr lang="en-US"/>
               <a:t>Click to edit Master subtitle style</a:t>
             </a:r>
-          </a:p>
-        </p:txBody>
-      </p:sp>
-      <p:sp>
-        <p:nvSpPr>
-          <p:cNvPr id="4" name="Date Placeholder 3">
-            <a:extLst>
-              <a:ext uri="{FF2B5EF4-FFF2-40B4-BE49-F238E27FC236}">
-                <a16:creationId xmlns:a16="http://schemas.microsoft.com/office/drawing/2014/main" id="{335FF076-2C81-A515-42F3-A2AC598B9D74}"/>
-              </a:ext>
-            </a:extLst>
-          </p:cNvPr>
+            <a:endParaRPr lang="en-US" dirty="0"/>
+          </a:p>
+        </p:txBody>
+      </p:sp>
+      <p:sp>
+        <p:nvSpPr>
+          <p:cNvPr id="4" name="Date Placeholder 3"/>
           <p:cNvSpPr>
             <a:spLocks noGrp="1"/>
           </p:cNvSpPr>
@@ -259,7 +243,7 @@
           <a:p>
             <a:fld id="{2F2CB8EC-5C29-448C-8D6A-56E8D36DC34F}" type="datetimeFigureOut">
               <a:rPr lang="en-US" smtClean="0"/>
-              <a:t>3/8/2026</a:t>
+              <a:t>3/11/2026</a:t>
             </a:fld>
             <a:endParaRPr lang="en-US"/>
           </a:p>
@@ -267,13 +251,7 @@
       </p:sp>
       <p:sp>
         <p:nvSpPr>
-          <p:cNvPr id="5" name="Footer Placeholder 4">
-            <a:extLst>
-              <a:ext uri="{FF2B5EF4-FFF2-40B4-BE49-F238E27FC236}">
-                <a16:creationId xmlns:a16="http://schemas.microsoft.com/office/drawing/2014/main" id="{E7416B02-0DFB-3057-3B77-91755B52FF38}"/>
-              </a:ext>
-            </a:extLst>
-          </p:cNvPr>
+          <p:cNvPr id="5" name="Footer Placeholder 4"/>
           <p:cNvSpPr>
             <a:spLocks noGrp="1"/>
           </p:cNvSpPr>
@@ -292,13 +270,7 @@
       </p:sp>
       <p:sp>
         <p:nvSpPr>
-          <p:cNvPr id="6" name="Slide Number Placeholder 5">
-            <a:extLst>
-              <a:ext uri="{FF2B5EF4-FFF2-40B4-BE49-F238E27FC236}">
-                <a16:creationId xmlns:a16="http://schemas.microsoft.com/office/drawing/2014/main" id="{88165EFE-7E7D-DD7A-11C5-5CE07CEF4461}"/>
-              </a:ext>
-            </a:extLst>
-          </p:cNvPr>
+          <p:cNvPr id="6" name="Slide Number Placeholder 5"/>
           <p:cNvSpPr>
             <a:spLocks noGrp="1"/>
           </p:cNvSpPr>
@@ -322,7 +294,7 @@
     </p:spTree>
     <p:extLst>
       <p:ext uri="{BB962C8B-B14F-4D97-AF65-F5344CB8AC3E}">
-        <p14:creationId xmlns:p14="http://schemas.microsoft.com/office/powerpoint/2010/main" val="1500868206"/>
+        <p14:creationId xmlns:p14="http://schemas.microsoft.com/office/powerpoint/2010/main" val="11700105"/>
       </p:ext>
     </p:extLst>
   </p:cSld>
@@ -351,13 +323,7 @@
       </p:grpSpPr>
       <p:sp>
         <p:nvSpPr>
-          <p:cNvPr id="2" name="Title 1">
-            <a:extLst>
-              <a:ext uri="{FF2B5EF4-FFF2-40B4-BE49-F238E27FC236}">
-                <a16:creationId xmlns:a16="http://schemas.microsoft.com/office/drawing/2014/main" id="{FCFEFA1F-21BB-7DD0-5A03-3EABC62DADD4}"/>
-              </a:ext>
-            </a:extLst>
-          </p:cNvPr>
+          <p:cNvPr id="2" name="Title 1"/>
           <p:cNvSpPr>
             <a:spLocks noGrp="1"/>
           </p:cNvSpPr>
@@ -374,18 +340,13 @@
               <a:rPr lang="en-US"/>
               <a:t>Click to edit Master title style</a:t>
             </a:r>
-          </a:p>
-        </p:txBody>
-      </p:sp>
-      <p:sp>
-        <p:nvSpPr>
-          <p:cNvPr id="3" name="Vertical Text Placeholder 2">
-            <a:extLst>
-              <a:ext uri="{FF2B5EF4-FFF2-40B4-BE49-F238E27FC236}">
-                <a16:creationId xmlns:a16="http://schemas.microsoft.com/office/drawing/2014/main" id="{9AC7AF52-D025-5B4F-CD51-40BD2402C725}"/>
-              </a:ext>
-            </a:extLst>
-          </p:cNvPr>
+            <a:endParaRPr lang="en-US" dirty="0"/>
+          </a:p>
+        </p:txBody>
+      </p:sp>
+      <p:sp>
+        <p:nvSpPr>
+          <p:cNvPr id="3" name="Vertical Text Placeholder 2"/>
           <p:cNvSpPr>
             <a:spLocks noGrp="1"/>
           </p:cNvSpPr>
@@ -431,18 +392,13 @@
               <a:rPr lang="en-US"/>
               <a:t>Fifth level</a:t>
             </a:r>
-          </a:p>
-        </p:txBody>
-      </p:sp>
-      <p:sp>
-        <p:nvSpPr>
-          <p:cNvPr id="4" name="Date Placeholder 3">
-            <a:extLst>
-              <a:ext uri="{FF2B5EF4-FFF2-40B4-BE49-F238E27FC236}">
-                <a16:creationId xmlns:a16="http://schemas.microsoft.com/office/drawing/2014/main" id="{3461EB25-702B-B3A1-2203-8E19EB20E597}"/>
-              </a:ext>
-            </a:extLst>
-          </p:cNvPr>
+            <a:endParaRPr lang="en-US" dirty="0"/>
+          </a:p>
+        </p:txBody>
+      </p:sp>
+      <p:sp>
+        <p:nvSpPr>
+          <p:cNvPr id="4" name="Date Placeholder 3"/>
           <p:cNvSpPr>
             <a:spLocks noGrp="1"/>
           </p:cNvSpPr>
@@ -457,7 +413,7 @@
           <a:p>
             <a:fld id="{2F2CB8EC-5C29-448C-8D6A-56E8D36DC34F}" type="datetimeFigureOut">
               <a:rPr lang="en-US" smtClean="0"/>
-              <a:t>3/8/2026</a:t>
+              <a:t>3/11/2026</a:t>
             </a:fld>
             <a:endParaRPr lang="en-US"/>
           </a:p>
@@ -465,13 +421,7 @@
       </p:sp>
       <p:sp>
         <p:nvSpPr>
-          <p:cNvPr id="5" name="Footer Placeholder 4">
-            <a:extLst>
-              <a:ext uri="{FF2B5EF4-FFF2-40B4-BE49-F238E27FC236}">
-                <a16:creationId xmlns:a16="http://schemas.microsoft.com/office/drawing/2014/main" id="{7F1EA06A-6E0C-3754-8F47-52D7D7902D6F}"/>
-              </a:ext>
-            </a:extLst>
-          </p:cNvPr>
+          <p:cNvPr id="5" name="Footer Placeholder 4"/>
           <p:cNvSpPr>
             <a:spLocks noGrp="1"/>
           </p:cNvSpPr>
@@ -490,13 +440,7 @@
       </p:sp>
       <p:sp>
         <p:nvSpPr>
-          <p:cNvPr id="6" name="Slide Number Placeholder 5">
-            <a:extLst>
-              <a:ext uri="{FF2B5EF4-FFF2-40B4-BE49-F238E27FC236}">
-                <a16:creationId xmlns:a16="http://schemas.microsoft.com/office/drawing/2014/main" id="{677EFD7A-346C-3E48-C483-A8CE0796815B}"/>
-              </a:ext>
-            </a:extLst>
-          </p:cNvPr>
+          <p:cNvPr id="6" name="Slide Number Placeholder 5"/>
           <p:cNvSpPr>
             <a:spLocks noGrp="1"/>
           </p:cNvSpPr>
@@ -520,7 +464,7 @@
     </p:spTree>
     <p:extLst>
       <p:ext uri="{BB962C8B-B14F-4D97-AF65-F5344CB8AC3E}">
-        <p14:creationId xmlns:p14="http://schemas.microsoft.com/office/powerpoint/2010/main" val="1914543395"/>
+        <p14:creationId xmlns:p14="http://schemas.microsoft.com/office/powerpoint/2010/main" val="2391131712"/>
       </p:ext>
     </p:extLst>
   </p:cSld>
@@ -549,13 +493,7 @@
       </p:grpSpPr>
       <p:sp>
         <p:nvSpPr>
-          <p:cNvPr id="2" name="Vertical Title 1">
-            <a:extLst>
-              <a:ext uri="{FF2B5EF4-FFF2-40B4-BE49-F238E27FC236}">
-                <a16:creationId xmlns:a16="http://schemas.microsoft.com/office/drawing/2014/main" id="{0CF4B6FE-75B4-7AF2-C29F-4A7A7DB11FFE}"/>
-              </a:ext>
-            </a:extLst>
-          </p:cNvPr>
+          <p:cNvPr id="2" name="Vertical Title 1"/>
           <p:cNvSpPr>
             <a:spLocks noGrp="1"/>
           </p:cNvSpPr>
@@ -565,8 +503,8 @@
         </p:nvSpPr>
         <p:spPr>
           <a:xfrm>
-            <a:off x="8724900" y="365125"/>
-            <a:ext cx="2628900" cy="5811838"/>
+            <a:off x="8724900" y="219075"/>
+            <a:ext cx="2628900" cy="3487103"/>
           </a:xfrm>
         </p:spPr>
         <p:txBody>
@@ -577,18 +515,13 @@
               <a:rPr lang="en-US"/>
               <a:t>Click to edit Master title style</a:t>
             </a:r>
-          </a:p>
-        </p:txBody>
-      </p:sp>
-      <p:sp>
-        <p:nvSpPr>
-          <p:cNvPr id="3" name="Vertical Text Placeholder 2">
-            <a:extLst>
-              <a:ext uri="{FF2B5EF4-FFF2-40B4-BE49-F238E27FC236}">
-                <a16:creationId xmlns:a16="http://schemas.microsoft.com/office/drawing/2014/main" id="{F4CE118D-2A09-8D48-1FD7-B281FBE8C61A}"/>
-              </a:ext>
-            </a:extLst>
-          </p:cNvPr>
+            <a:endParaRPr lang="en-US" dirty="0"/>
+          </a:p>
+        </p:txBody>
+      </p:sp>
+      <p:sp>
+        <p:nvSpPr>
+          <p:cNvPr id="3" name="Vertical Text Placeholder 2"/>
           <p:cNvSpPr>
             <a:spLocks noGrp="1"/>
           </p:cNvSpPr>
@@ -598,8 +531,8 @@
         </p:nvSpPr>
         <p:spPr>
           <a:xfrm>
-            <a:off x="838200" y="365125"/>
-            <a:ext cx="7734300" cy="5811838"/>
+            <a:off x="838200" y="219075"/>
+            <a:ext cx="7734300" cy="3487103"/>
           </a:xfrm>
         </p:spPr>
         <p:txBody>
@@ -639,18 +572,13 @@
               <a:rPr lang="en-US"/>
               <a:t>Fifth level</a:t>
             </a:r>
-          </a:p>
-        </p:txBody>
-      </p:sp>
-      <p:sp>
-        <p:nvSpPr>
-          <p:cNvPr id="4" name="Date Placeholder 3">
-            <a:extLst>
-              <a:ext uri="{FF2B5EF4-FFF2-40B4-BE49-F238E27FC236}">
-                <a16:creationId xmlns:a16="http://schemas.microsoft.com/office/drawing/2014/main" id="{A8B559AD-3AF0-02EC-E0AF-22829E14D1A9}"/>
-              </a:ext>
-            </a:extLst>
-          </p:cNvPr>
+            <a:endParaRPr lang="en-US" dirty="0"/>
+          </a:p>
+        </p:txBody>
+      </p:sp>
+      <p:sp>
+        <p:nvSpPr>
+          <p:cNvPr id="4" name="Date Placeholder 3"/>
           <p:cNvSpPr>
             <a:spLocks noGrp="1"/>
           </p:cNvSpPr>
@@ -665,7 +593,7 @@
           <a:p>
             <a:fld id="{2F2CB8EC-5C29-448C-8D6A-56E8D36DC34F}" type="datetimeFigureOut">
               <a:rPr lang="en-US" smtClean="0"/>
-              <a:t>3/8/2026</a:t>
+              <a:t>3/11/2026</a:t>
             </a:fld>
             <a:endParaRPr lang="en-US"/>
           </a:p>
@@ -673,13 +601,7 @@
       </p:sp>
       <p:sp>
         <p:nvSpPr>
-          <p:cNvPr id="5" name="Footer Placeholder 4">
-            <a:extLst>
-              <a:ext uri="{FF2B5EF4-FFF2-40B4-BE49-F238E27FC236}">
-                <a16:creationId xmlns:a16="http://schemas.microsoft.com/office/drawing/2014/main" id="{B642EEDD-1531-E68F-867F-F45AB0B803AD}"/>
-              </a:ext>
-            </a:extLst>
-          </p:cNvPr>
+          <p:cNvPr id="5" name="Footer Placeholder 4"/>
           <p:cNvSpPr>
             <a:spLocks noGrp="1"/>
           </p:cNvSpPr>
@@ -698,13 +620,7 @@
       </p:sp>
       <p:sp>
         <p:nvSpPr>
-          <p:cNvPr id="6" name="Slide Number Placeholder 5">
-            <a:extLst>
-              <a:ext uri="{FF2B5EF4-FFF2-40B4-BE49-F238E27FC236}">
-                <a16:creationId xmlns:a16="http://schemas.microsoft.com/office/drawing/2014/main" id="{C3D4DE54-0988-E915-DAF5-29D3D47A43E1}"/>
-              </a:ext>
-            </a:extLst>
-          </p:cNvPr>
+          <p:cNvPr id="6" name="Slide Number Placeholder 5"/>
           <p:cNvSpPr>
             <a:spLocks noGrp="1"/>
           </p:cNvSpPr>
@@ -728,7 +644,7 @@
     </p:spTree>
     <p:extLst>
       <p:ext uri="{BB962C8B-B14F-4D97-AF65-F5344CB8AC3E}">
-        <p14:creationId xmlns:p14="http://schemas.microsoft.com/office/powerpoint/2010/main" val="3214847377"/>
+        <p14:creationId xmlns:p14="http://schemas.microsoft.com/office/powerpoint/2010/main" val="134182557"/>
       </p:ext>
     </p:extLst>
   </p:cSld>
@@ -757,13 +673,7 @@
       </p:grpSpPr>
       <p:sp>
         <p:nvSpPr>
-          <p:cNvPr id="2" name="Title 1">
-            <a:extLst>
-              <a:ext uri="{FF2B5EF4-FFF2-40B4-BE49-F238E27FC236}">
-                <a16:creationId xmlns:a16="http://schemas.microsoft.com/office/drawing/2014/main" id="{31446304-D013-A542-CA89-052A81219DFA}"/>
-              </a:ext>
-            </a:extLst>
-          </p:cNvPr>
+          <p:cNvPr id="2" name="Title 1"/>
           <p:cNvSpPr>
             <a:spLocks noGrp="1"/>
           </p:cNvSpPr>
@@ -780,18 +690,13 @@
               <a:rPr lang="en-US"/>
               <a:t>Click to edit Master title style</a:t>
             </a:r>
-          </a:p>
-        </p:txBody>
-      </p:sp>
-      <p:sp>
-        <p:nvSpPr>
-          <p:cNvPr id="3" name="Content Placeholder 2">
-            <a:extLst>
-              <a:ext uri="{FF2B5EF4-FFF2-40B4-BE49-F238E27FC236}">
-                <a16:creationId xmlns:a16="http://schemas.microsoft.com/office/drawing/2014/main" id="{6DB52E85-2626-8960-0752-161F397BCEBE}"/>
-              </a:ext>
-            </a:extLst>
-          </p:cNvPr>
+            <a:endParaRPr lang="en-US" dirty="0"/>
+          </a:p>
+        </p:txBody>
+      </p:sp>
+      <p:sp>
+        <p:nvSpPr>
+          <p:cNvPr id="3" name="Content Placeholder 2"/>
           <p:cNvSpPr>
             <a:spLocks noGrp="1"/>
           </p:cNvSpPr>
@@ -837,18 +742,13 @@
               <a:rPr lang="en-US"/>
               <a:t>Fifth level</a:t>
             </a:r>
-          </a:p>
-        </p:txBody>
-      </p:sp>
-      <p:sp>
-        <p:nvSpPr>
-          <p:cNvPr id="4" name="Date Placeholder 3">
-            <a:extLst>
-              <a:ext uri="{FF2B5EF4-FFF2-40B4-BE49-F238E27FC236}">
-                <a16:creationId xmlns:a16="http://schemas.microsoft.com/office/drawing/2014/main" id="{E479F8F6-6026-01B1-BA7D-DA53C76FC4A8}"/>
-              </a:ext>
-            </a:extLst>
-          </p:cNvPr>
+            <a:endParaRPr lang="en-US" dirty="0"/>
+          </a:p>
+        </p:txBody>
+      </p:sp>
+      <p:sp>
+        <p:nvSpPr>
+          <p:cNvPr id="4" name="Date Placeholder 3"/>
           <p:cNvSpPr>
             <a:spLocks noGrp="1"/>
           </p:cNvSpPr>
@@ -863,7 +763,7 @@
           <a:p>
             <a:fld id="{2F2CB8EC-5C29-448C-8D6A-56E8D36DC34F}" type="datetimeFigureOut">
               <a:rPr lang="en-US" smtClean="0"/>
-              <a:t>3/8/2026</a:t>
+              <a:t>3/11/2026</a:t>
             </a:fld>
             <a:endParaRPr lang="en-US"/>
           </a:p>
@@ -871,13 +771,7 @@
       </p:sp>
       <p:sp>
         <p:nvSpPr>
-          <p:cNvPr id="5" name="Footer Placeholder 4">
-            <a:extLst>
-              <a:ext uri="{FF2B5EF4-FFF2-40B4-BE49-F238E27FC236}">
-                <a16:creationId xmlns:a16="http://schemas.microsoft.com/office/drawing/2014/main" id="{635C1D0A-EE21-F4A2-BB4E-E92F6556A684}"/>
-              </a:ext>
-            </a:extLst>
-          </p:cNvPr>
+          <p:cNvPr id="5" name="Footer Placeholder 4"/>
           <p:cNvSpPr>
             <a:spLocks noGrp="1"/>
           </p:cNvSpPr>
@@ -896,13 +790,7 @@
       </p:sp>
       <p:sp>
         <p:nvSpPr>
-          <p:cNvPr id="6" name="Slide Number Placeholder 5">
-            <a:extLst>
-              <a:ext uri="{FF2B5EF4-FFF2-40B4-BE49-F238E27FC236}">
-                <a16:creationId xmlns:a16="http://schemas.microsoft.com/office/drawing/2014/main" id="{2A277FFB-9A88-C898-5F48-90D0BC19B465}"/>
-              </a:ext>
-            </a:extLst>
-          </p:cNvPr>
+          <p:cNvPr id="6" name="Slide Number Placeholder 5"/>
           <p:cNvSpPr>
             <a:spLocks noGrp="1"/>
           </p:cNvSpPr>
@@ -926,7 +814,7 @@
     </p:spTree>
     <p:extLst>
       <p:ext uri="{BB962C8B-B14F-4D97-AF65-F5344CB8AC3E}">
-        <p14:creationId xmlns:p14="http://schemas.microsoft.com/office/powerpoint/2010/main" val="255706545"/>
+        <p14:creationId xmlns:p14="http://schemas.microsoft.com/office/powerpoint/2010/main" val="562393893"/>
       </p:ext>
     </p:extLst>
   </p:cSld>
@@ -955,13 +843,7 @@
       </p:grpSpPr>
       <p:sp>
         <p:nvSpPr>
-          <p:cNvPr id="2" name="Title 1">
-            <a:extLst>
-              <a:ext uri="{FF2B5EF4-FFF2-40B4-BE49-F238E27FC236}">
-                <a16:creationId xmlns:a16="http://schemas.microsoft.com/office/drawing/2014/main" id="{A41EEC65-9F96-9FDA-2855-AE5C0889BDE2}"/>
-              </a:ext>
-            </a:extLst>
-          </p:cNvPr>
+          <p:cNvPr id="2" name="Title 1"/>
           <p:cNvSpPr>
             <a:spLocks noGrp="1"/>
           </p:cNvSpPr>
@@ -971,15 +853,15 @@
         </p:nvSpPr>
         <p:spPr>
           <a:xfrm>
-            <a:off x="831850" y="1709738"/>
-            <a:ext cx="10515600" cy="2852737"/>
+            <a:off x="831850" y="1025843"/>
+            <a:ext cx="10515600" cy="1711642"/>
           </a:xfrm>
         </p:spPr>
         <p:txBody>
           <a:bodyPr anchor="b"/>
           <a:lstStyle>
             <a:lvl1pPr>
-              <a:defRPr sz="6000"/>
+              <a:defRPr sz="3600"/>
             </a:lvl1pPr>
           </a:lstStyle>
           <a:p>
@@ -987,18 +869,13 @@
               <a:rPr lang="en-US"/>
               <a:t>Click to edit Master title style</a:t>
             </a:r>
-          </a:p>
-        </p:txBody>
-      </p:sp>
-      <p:sp>
-        <p:nvSpPr>
-          <p:cNvPr id="3" name="Text Placeholder 2">
-            <a:extLst>
-              <a:ext uri="{FF2B5EF4-FFF2-40B4-BE49-F238E27FC236}">
-                <a16:creationId xmlns:a16="http://schemas.microsoft.com/office/drawing/2014/main" id="{431128A4-5FC6-DC57-94FA-E26ADEB3660F}"/>
-              </a:ext>
-            </a:extLst>
-          </p:cNvPr>
+            <a:endParaRPr lang="en-US" dirty="0"/>
+          </a:p>
+        </p:txBody>
+      </p:sp>
+      <p:sp>
+        <p:nvSpPr>
+          <p:cNvPr id="3" name="Text Placeholder 2"/>
           <p:cNvSpPr>
             <a:spLocks noGrp="1"/>
           </p:cNvSpPr>
@@ -1008,8 +885,8 @@
         </p:nvSpPr>
         <p:spPr>
           <a:xfrm>
-            <a:off x="831850" y="4589463"/>
-            <a:ext cx="10515600" cy="1500187"/>
+            <a:off x="831850" y="2753678"/>
+            <a:ext cx="10515600" cy="900112"/>
           </a:xfrm>
         </p:spPr>
         <p:txBody>
@@ -1017,7 +894,7 @@
           <a:lstStyle>
             <a:lvl1pPr marL="0" indent="0">
               <a:buNone/>
-              <a:defRPr sz="2400">
+              <a:defRPr sz="1440">
                 <a:solidFill>
                   <a:schemeClr val="tx1">
                     <a:tint val="82000"/>
@@ -1025,9 +902,9 @@
                 </a:solidFill>
               </a:defRPr>
             </a:lvl1pPr>
-            <a:lvl2pPr marL="457200" indent="0">
-              <a:buNone/>
-              <a:defRPr sz="2000">
+            <a:lvl2pPr marL="274320" indent="0">
+              <a:buNone/>
+              <a:defRPr sz="1200">
                 <a:solidFill>
                   <a:schemeClr val="tx1">
                     <a:tint val="82000"/>
@@ -1035,9 +912,9 @@
                 </a:solidFill>
               </a:defRPr>
             </a:lvl2pPr>
-            <a:lvl3pPr marL="914400" indent="0">
-              <a:buNone/>
-              <a:defRPr sz="1800">
+            <a:lvl3pPr marL="548640" indent="0">
+              <a:buNone/>
+              <a:defRPr sz="1080">
                 <a:solidFill>
                   <a:schemeClr val="tx1">
                     <a:tint val="82000"/>
@@ -1045,9 +922,9 @@
                 </a:solidFill>
               </a:defRPr>
             </a:lvl3pPr>
-            <a:lvl4pPr marL="1371600" indent="0">
-              <a:buNone/>
-              <a:defRPr sz="1600">
+            <a:lvl4pPr marL="822960" indent="0">
+              <a:buNone/>
+              <a:defRPr sz="960">
                 <a:solidFill>
                   <a:schemeClr val="tx1">
                     <a:tint val="82000"/>
@@ -1055,9 +932,9 @@
                 </a:solidFill>
               </a:defRPr>
             </a:lvl4pPr>
-            <a:lvl5pPr marL="1828800" indent="0">
-              <a:buNone/>
-              <a:defRPr sz="1600">
+            <a:lvl5pPr marL="1097280" indent="0">
+              <a:buNone/>
+              <a:defRPr sz="960">
                 <a:solidFill>
                   <a:schemeClr val="tx1">
                     <a:tint val="82000"/>
@@ -1065,9 +942,9 @@
                 </a:solidFill>
               </a:defRPr>
             </a:lvl5pPr>
-            <a:lvl6pPr marL="2286000" indent="0">
-              <a:buNone/>
-              <a:defRPr sz="1600">
+            <a:lvl6pPr marL="1371600" indent="0">
+              <a:buNone/>
+              <a:defRPr sz="960">
                 <a:solidFill>
                   <a:schemeClr val="tx1">
                     <a:tint val="82000"/>
@@ -1075,9 +952,9 @@
                 </a:solidFill>
               </a:defRPr>
             </a:lvl6pPr>
-            <a:lvl7pPr marL="2743200" indent="0">
-              <a:buNone/>
-              <a:defRPr sz="1600">
+            <a:lvl7pPr marL="1645920" indent="0">
+              <a:buNone/>
+              <a:defRPr sz="960">
                 <a:solidFill>
                   <a:schemeClr val="tx1">
                     <a:tint val="82000"/>
@@ -1085,9 +962,9 @@
                 </a:solidFill>
               </a:defRPr>
             </a:lvl7pPr>
-            <a:lvl8pPr marL="3200400" indent="0">
-              <a:buNone/>
-              <a:defRPr sz="1600">
+            <a:lvl8pPr marL="1920240" indent="0">
+              <a:buNone/>
+              <a:defRPr sz="960">
                 <a:solidFill>
                   <a:schemeClr val="tx1">
                     <a:tint val="82000"/>
@@ -1095,9 +972,9 @@
                 </a:solidFill>
               </a:defRPr>
             </a:lvl8pPr>
-            <a:lvl9pPr marL="3657600" indent="0">
-              <a:buNone/>
-              <a:defRPr sz="1600">
+            <a:lvl9pPr marL="2194560" indent="0">
+              <a:buNone/>
+              <a:defRPr sz="960">
                 <a:solidFill>
                   <a:schemeClr val="tx1">
                     <a:tint val="82000"/>
@@ -1117,13 +994,7 @@
       </p:sp>
       <p:sp>
         <p:nvSpPr>
-          <p:cNvPr id="4" name="Date Placeholder 3">
-            <a:extLst>
-              <a:ext uri="{FF2B5EF4-FFF2-40B4-BE49-F238E27FC236}">
-                <a16:creationId xmlns:a16="http://schemas.microsoft.com/office/drawing/2014/main" id="{891D9442-B61D-B6B8-FF11-ED202FBAC4A2}"/>
-              </a:ext>
-            </a:extLst>
-          </p:cNvPr>
+          <p:cNvPr id="4" name="Date Placeholder 3"/>
           <p:cNvSpPr>
             <a:spLocks noGrp="1"/>
           </p:cNvSpPr>
@@ -1138,7 +1009,7 @@
           <a:p>
             <a:fld id="{2F2CB8EC-5C29-448C-8D6A-56E8D36DC34F}" type="datetimeFigureOut">
               <a:rPr lang="en-US" smtClean="0"/>
-              <a:t>3/8/2026</a:t>
+              <a:t>3/11/2026</a:t>
             </a:fld>
             <a:endParaRPr lang="en-US"/>
           </a:p>
@@ -1146,13 +1017,7 @@
       </p:sp>
       <p:sp>
         <p:nvSpPr>
-          <p:cNvPr id="5" name="Footer Placeholder 4">
-            <a:extLst>
-              <a:ext uri="{FF2B5EF4-FFF2-40B4-BE49-F238E27FC236}">
-                <a16:creationId xmlns:a16="http://schemas.microsoft.com/office/drawing/2014/main" id="{3CB119EF-5F59-EA40-B834-5728885977A0}"/>
-              </a:ext>
-            </a:extLst>
-          </p:cNvPr>
+          <p:cNvPr id="5" name="Footer Placeholder 4"/>
           <p:cNvSpPr>
             <a:spLocks noGrp="1"/>
           </p:cNvSpPr>
@@ -1171,13 +1036,7 @@
       </p:sp>
       <p:sp>
         <p:nvSpPr>
-          <p:cNvPr id="6" name="Slide Number Placeholder 5">
-            <a:extLst>
-              <a:ext uri="{FF2B5EF4-FFF2-40B4-BE49-F238E27FC236}">
-                <a16:creationId xmlns:a16="http://schemas.microsoft.com/office/drawing/2014/main" id="{CE51D84C-F967-187A-02EC-AEC19FD06934}"/>
-              </a:ext>
-            </a:extLst>
-          </p:cNvPr>
+          <p:cNvPr id="6" name="Slide Number Placeholder 5"/>
           <p:cNvSpPr>
             <a:spLocks noGrp="1"/>
           </p:cNvSpPr>
@@ -1201,7 +1060,7 @@
     </p:spTree>
     <p:extLst>
       <p:ext uri="{BB962C8B-B14F-4D97-AF65-F5344CB8AC3E}">
-        <p14:creationId xmlns:p14="http://schemas.microsoft.com/office/powerpoint/2010/main" val="3167158312"/>
+        <p14:creationId xmlns:p14="http://schemas.microsoft.com/office/powerpoint/2010/main" val="3283360435"/>
       </p:ext>
     </p:extLst>
   </p:cSld>
@@ -1230,13 +1089,7 @@
       </p:grpSpPr>
       <p:sp>
         <p:nvSpPr>
-          <p:cNvPr id="2" name="Title 1">
-            <a:extLst>
-              <a:ext uri="{FF2B5EF4-FFF2-40B4-BE49-F238E27FC236}">
-                <a16:creationId xmlns:a16="http://schemas.microsoft.com/office/drawing/2014/main" id="{A858B8CA-A0D3-A304-505D-96282D29A2D8}"/>
-              </a:ext>
-            </a:extLst>
-          </p:cNvPr>
+          <p:cNvPr id="2" name="Title 1"/>
           <p:cNvSpPr>
             <a:spLocks noGrp="1"/>
           </p:cNvSpPr>
@@ -1253,18 +1106,13 @@
               <a:rPr lang="en-US"/>
               <a:t>Click to edit Master title style</a:t>
             </a:r>
-          </a:p>
-        </p:txBody>
-      </p:sp>
-      <p:sp>
-        <p:nvSpPr>
-          <p:cNvPr id="3" name="Content Placeholder 2">
-            <a:extLst>
-              <a:ext uri="{FF2B5EF4-FFF2-40B4-BE49-F238E27FC236}">
-                <a16:creationId xmlns:a16="http://schemas.microsoft.com/office/drawing/2014/main" id="{3D672060-E624-DF63-3023-38090E6A1164}"/>
-              </a:ext>
-            </a:extLst>
-          </p:cNvPr>
+            <a:endParaRPr lang="en-US" dirty="0"/>
+          </a:p>
+        </p:txBody>
+      </p:sp>
+      <p:sp>
+        <p:nvSpPr>
+          <p:cNvPr id="3" name="Content Placeholder 2"/>
           <p:cNvSpPr>
             <a:spLocks noGrp="1"/>
           </p:cNvSpPr>
@@ -1274,8 +1122,8 @@
         </p:nvSpPr>
         <p:spPr>
           <a:xfrm>
-            <a:off x="838200" y="1825625"/>
-            <a:ext cx="5181600" cy="4351338"/>
+            <a:off x="838200" y="1095375"/>
+            <a:ext cx="5181600" cy="2610803"/>
           </a:xfrm>
         </p:spPr>
         <p:txBody>
@@ -1315,18 +1163,13 @@
               <a:rPr lang="en-US"/>
               <a:t>Fifth level</a:t>
             </a:r>
-          </a:p>
-        </p:txBody>
-      </p:sp>
-      <p:sp>
-        <p:nvSpPr>
-          <p:cNvPr id="4" name="Content Placeholder 3">
-            <a:extLst>
-              <a:ext uri="{FF2B5EF4-FFF2-40B4-BE49-F238E27FC236}">
-                <a16:creationId xmlns:a16="http://schemas.microsoft.com/office/drawing/2014/main" id="{AE5B2077-523F-4621-754D-4F753FFDF7DF}"/>
-              </a:ext>
-            </a:extLst>
-          </p:cNvPr>
+            <a:endParaRPr lang="en-US" dirty="0"/>
+          </a:p>
+        </p:txBody>
+      </p:sp>
+      <p:sp>
+        <p:nvSpPr>
+          <p:cNvPr id="4" name="Content Placeholder 3"/>
           <p:cNvSpPr>
             <a:spLocks noGrp="1"/>
           </p:cNvSpPr>
@@ -1336,8 +1179,8 @@
         </p:nvSpPr>
         <p:spPr>
           <a:xfrm>
-            <a:off x="6172200" y="1825625"/>
-            <a:ext cx="5181600" cy="4351338"/>
+            <a:off x="6172200" y="1095375"/>
+            <a:ext cx="5181600" cy="2610803"/>
           </a:xfrm>
         </p:spPr>
         <p:txBody>
@@ -1377,18 +1220,13 @@
               <a:rPr lang="en-US"/>
               <a:t>Fifth level</a:t>
             </a:r>
-          </a:p>
-        </p:txBody>
-      </p:sp>
-      <p:sp>
-        <p:nvSpPr>
-          <p:cNvPr id="5" name="Date Placeholder 4">
-            <a:extLst>
-              <a:ext uri="{FF2B5EF4-FFF2-40B4-BE49-F238E27FC236}">
-                <a16:creationId xmlns:a16="http://schemas.microsoft.com/office/drawing/2014/main" id="{F2C4E72B-07AE-001E-ABFB-82A3AE9F4522}"/>
-              </a:ext>
-            </a:extLst>
-          </p:cNvPr>
+            <a:endParaRPr lang="en-US" dirty="0"/>
+          </a:p>
+        </p:txBody>
+      </p:sp>
+      <p:sp>
+        <p:nvSpPr>
+          <p:cNvPr id="5" name="Date Placeholder 4"/>
           <p:cNvSpPr>
             <a:spLocks noGrp="1"/>
           </p:cNvSpPr>
@@ -1403,7 +1241,7 @@
           <a:p>
             <a:fld id="{2F2CB8EC-5C29-448C-8D6A-56E8D36DC34F}" type="datetimeFigureOut">
               <a:rPr lang="en-US" smtClean="0"/>
-              <a:t>3/8/2026</a:t>
+              <a:t>3/11/2026</a:t>
             </a:fld>
             <a:endParaRPr lang="en-US"/>
           </a:p>
@@ -1411,13 +1249,7 @@
       </p:sp>
       <p:sp>
         <p:nvSpPr>
-          <p:cNvPr id="6" name="Footer Placeholder 5">
-            <a:extLst>
-              <a:ext uri="{FF2B5EF4-FFF2-40B4-BE49-F238E27FC236}">
-                <a16:creationId xmlns:a16="http://schemas.microsoft.com/office/drawing/2014/main" id="{3800F7A2-AAB9-F4CC-EE93-FCB8F5C9649B}"/>
-              </a:ext>
-            </a:extLst>
-          </p:cNvPr>
+          <p:cNvPr id="6" name="Footer Placeholder 5"/>
           <p:cNvSpPr>
             <a:spLocks noGrp="1"/>
           </p:cNvSpPr>
@@ -1436,13 +1268,7 @@
       </p:sp>
       <p:sp>
         <p:nvSpPr>
-          <p:cNvPr id="7" name="Slide Number Placeholder 6">
-            <a:extLst>
-              <a:ext uri="{FF2B5EF4-FFF2-40B4-BE49-F238E27FC236}">
-                <a16:creationId xmlns:a16="http://schemas.microsoft.com/office/drawing/2014/main" id="{08AF91B8-D6D7-12D7-2493-A18B5EE24CFE}"/>
-              </a:ext>
-            </a:extLst>
-          </p:cNvPr>
+          <p:cNvPr id="7" name="Slide Number Placeholder 6"/>
           <p:cNvSpPr>
             <a:spLocks noGrp="1"/>
           </p:cNvSpPr>
@@ -1466,7 +1292,7 @@
     </p:spTree>
     <p:extLst>
       <p:ext uri="{BB962C8B-B14F-4D97-AF65-F5344CB8AC3E}">
-        <p14:creationId xmlns:p14="http://schemas.microsoft.com/office/powerpoint/2010/main" val="393057130"/>
+        <p14:creationId xmlns:p14="http://schemas.microsoft.com/office/powerpoint/2010/main" val="958184788"/>
       </p:ext>
     </p:extLst>
   </p:cSld>
@@ -1495,13 +1321,7 @@
       </p:grpSpPr>
       <p:sp>
         <p:nvSpPr>
-          <p:cNvPr id="2" name="Title 1">
-            <a:extLst>
-              <a:ext uri="{FF2B5EF4-FFF2-40B4-BE49-F238E27FC236}">
-                <a16:creationId xmlns:a16="http://schemas.microsoft.com/office/drawing/2014/main" id="{A3920141-0C0E-0EF8-DA96-63A76D7A52DD}"/>
-              </a:ext>
-            </a:extLst>
-          </p:cNvPr>
+          <p:cNvPr id="2" name="Title 1"/>
           <p:cNvSpPr>
             <a:spLocks noGrp="1"/>
           </p:cNvSpPr>
@@ -1511,8 +1331,8 @@
         </p:nvSpPr>
         <p:spPr>
           <a:xfrm>
-            <a:off x="839788" y="365125"/>
-            <a:ext cx="10515600" cy="1325563"/>
+            <a:off x="839788" y="219075"/>
+            <a:ext cx="10515600" cy="795338"/>
           </a:xfrm>
         </p:spPr>
         <p:txBody>
@@ -1523,18 +1343,13 @@
               <a:rPr lang="en-US"/>
               <a:t>Click to edit Master title style</a:t>
             </a:r>
-          </a:p>
-        </p:txBody>
-      </p:sp>
-      <p:sp>
-        <p:nvSpPr>
-          <p:cNvPr id="3" name="Text Placeholder 2">
-            <a:extLst>
-              <a:ext uri="{FF2B5EF4-FFF2-40B4-BE49-F238E27FC236}">
-                <a16:creationId xmlns:a16="http://schemas.microsoft.com/office/drawing/2014/main" id="{C9449D9F-E2B8-7CB7-C632-D8F25CB378ED}"/>
-              </a:ext>
-            </a:extLst>
-          </p:cNvPr>
+            <a:endParaRPr lang="en-US" dirty="0"/>
+          </a:p>
+        </p:txBody>
+      </p:sp>
+      <p:sp>
+        <p:nvSpPr>
+          <p:cNvPr id="3" name="Text Placeholder 2"/>
           <p:cNvSpPr>
             <a:spLocks noGrp="1"/>
           </p:cNvSpPr>
@@ -1544,8 +1359,8 @@
         </p:nvSpPr>
         <p:spPr>
           <a:xfrm>
-            <a:off x="839788" y="1681163"/>
-            <a:ext cx="5157787" cy="823912"/>
+            <a:off x="839789" y="1008698"/>
+            <a:ext cx="5157787" cy="494347"/>
           </a:xfrm>
         </p:spPr>
         <p:txBody>
@@ -1553,39 +1368,39 @@
           <a:lstStyle>
             <a:lvl1pPr marL="0" indent="0">
               <a:buNone/>
-              <a:defRPr sz="2400" b="1"/>
+              <a:defRPr sz="1440" b="1"/>
             </a:lvl1pPr>
-            <a:lvl2pPr marL="457200" indent="0">
-              <a:buNone/>
-              <a:defRPr sz="2000" b="1"/>
+            <a:lvl2pPr marL="274320" indent="0">
+              <a:buNone/>
+              <a:defRPr sz="1200" b="1"/>
             </a:lvl2pPr>
-            <a:lvl3pPr marL="914400" indent="0">
-              <a:buNone/>
-              <a:defRPr sz="1800" b="1"/>
+            <a:lvl3pPr marL="548640" indent="0">
+              <a:buNone/>
+              <a:defRPr sz="1080" b="1"/>
             </a:lvl3pPr>
-            <a:lvl4pPr marL="1371600" indent="0">
-              <a:buNone/>
-              <a:defRPr sz="1600" b="1"/>
+            <a:lvl4pPr marL="822960" indent="0">
+              <a:buNone/>
+              <a:defRPr sz="960" b="1"/>
             </a:lvl4pPr>
-            <a:lvl5pPr marL="1828800" indent="0">
-              <a:buNone/>
-              <a:defRPr sz="1600" b="1"/>
+            <a:lvl5pPr marL="1097280" indent="0">
+              <a:buNone/>
+              <a:defRPr sz="960" b="1"/>
             </a:lvl5pPr>
-            <a:lvl6pPr marL="2286000" indent="0">
-              <a:buNone/>
-              <a:defRPr sz="1600" b="1"/>
+            <a:lvl6pPr marL="1371600" indent="0">
+              <a:buNone/>
+              <a:defRPr sz="960" b="1"/>
             </a:lvl6pPr>
-            <a:lvl7pPr marL="2743200" indent="0">
-              <a:buNone/>
-              <a:defRPr sz="1600" b="1"/>
+            <a:lvl7pPr marL="1645920" indent="0">
+              <a:buNone/>
+              <a:defRPr sz="960" b="1"/>
             </a:lvl7pPr>
-            <a:lvl8pPr marL="3200400" indent="0">
-              <a:buNone/>
-              <a:defRPr sz="1600" b="1"/>
+            <a:lvl8pPr marL="1920240" indent="0">
+              <a:buNone/>
+              <a:defRPr sz="960" b="1"/>
             </a:lvl8pPr>
-            <a:lvl9pPr marL="3657600" indent="0">
-              <a:buNone/>
-              <a:defRPr sz="1600" b="1"/>
+            <a:lvl9pPr marL="2194560" indent="0">
+              <a:buNone/>
+              <a:defRPr sz="960" b="1"/>
             </a:lvl9pPr>
           </a:lstStyle>
           <a:p>
@@ -1599,13 +1414,7 @@
       </p:sp>
       <p:sp>
         <p:nvSpPr>
-          <p:cNvPr id="4" name="Content Placeholder 3">
-            <a:extLst>
-              <a:ext uri="{FF2B5EF4-FFF2-40B4-BE49-F238E27FC236}">
-                <a16:creationId xmlns:a16="http://schemas.microsoft.com/office/drawing/2014/main" id="{8398293F-2663-E29C-0642-7CBC769D3814}"/>
-              </a:ext>
-            </a:extLst>
-          </p:cNvPr>
+          <p:cNvPr id="4" name="Content Placeholder 3"/>
           <p:cNvSpPr>
             <a:spLocks noGrp="1"/>
           </p:cNvSpPr>
@@ -1615,8 +1424,8 @@
         </p:nvSpPr>
         <p:spPr>
           <a:xfrm>
-            <a:off x="839788" y="2505075"/>
-            <a:ext cx="5157787" cy="3684588"/>
+            <a:off x="839789" y="1503045"/>
+            <a:ext cx="5157787" cy="2210753"/>
           </a:xfrm>
         </p:spPr>
         <p:txBody>
@@ -1656,18 +1465,13 @@
               <a:rPr lang="en-US"/>
               <a:t>Fifth level</a:t>
             </a:r>
-          </a:p>
-        </p:txBody>
-      </p:sp>
-      <p:sp>
-        <p:nvSpPr>
-          <p:cNvPr id="5" name="Text Placeholder 4">
-            <a:extLst>
-              <a:ext uri="{FF2B5EF4-FFF2-40B4-BE49-F238E27FC236}">
-                <a16:creationId xmlns:a16="http://schemas.microsoft.com/office/drawing/2014/main" id="{387A4DD9-6C57-3E01-F0DD-86369C45B474}"/>
-              </a:ext>
-            </a:extLst>
-          </p:cNvPr>
+            <a:endParaRPr lang="en-US" dirty="0"/>
+          </a:p>
+        </p:txBody>
+      </p:sp>
+      <p:sp>
+        <p:nvSpPr>
+          <p:cNvPr id="5" name="Text Placeholder 4"/>
           <p:cNvSpPr>
             <a:spLocks noGrp="1"/>
           </p:cNvSpPr>
@@ -1677,8 +1481,8 @@
         </p:nvSpPr>
         <p:spPr>
           <a:xfrm>
-            <a:off x="6172200" y="1681163"/>
-            <a:ext cx="5183188" cy="823912"/>
+            <a:off x="6172200" y="1008698"/>
+            <a:ext cx="5183188" cy="494347"/>
           </a:xfrm>
         </p:spPr>
         <p:txBody>
@@ -1686,39 +1490,39 @@
           <a:lstStyle>
             <a:lvl1pPr marL="0" indent="0">
               <a:buNone/>
-              <a:defRPr sz="2400" b="1"/>
+              <a:defRPr sz="1440" b="1"/>
             </a:lvl1pPr>
-            <a:lvl2pPr marL="457200" indent="0">
-              <a:buNone/>
-              <a:defRPr sz="2000" b="1"/>
+            <a:lvl2pPr marL="274320" indent="0">
+              <a:buNone/>
+              <a:defRPr sz="1200" b="1"/>
             </a:lvl2pPr>
-            <a:lvl3pPr marL="914400" indent="0">
-              <a:buNone/>
-              <a:defRPr sz="1800" b="1"/>
+            <a:lvl3pPr marL="548640" indent="0">
+              <a:buNone/>
+              <a:defRPr sz="1080" b="1"/>
             </a:lvl3pPr>
-            <a:lvl4pPr marL="1371600" indent="0">
-              <a:buNone/>
-              <a:defRPr sz="1600" b="1"/>
+            <a:lvl4pPr marL="822960" indent="0">
+              <a:buNone/>
+              <a:defRPr sz="960" b="1"/>
             </a:lvl4pPr>
-            <a:lvl5pPr marL="1828800" indent="0">
-              <a:buNone/>
-              <a:defRPr sz="1600" b="1"/>
+            <a:lvl5pPr marL="1097280" indent="0">
+              <a:buNone/>
+              <a:defRPr sz="960" b="1"/>
             </a:lvl5pPr>
-            <a:lvl6pPr marL="2286000" indent="0">
-              <a:buNone/>
-              <a:defRPr sz="1600" b="1"/>
+            <a:lvl6pPr marL="1371600" indent="0">
+              <a:buNone/>
+              <a:defRPr sz="960" b="1"/>
             </a:lvl6pPr>
-            <a:lvl7pPr marL="2743200" indent="0">
-              <a:buNone/>
-              <a:defRPr sz="1600" b="1"/>
+            <a:lvl7pPr marL="1645920" indent="0">
+              <a:buNone/>
+              <a:defRPr sz="960" b="1"/>
             </a:lvl7pPr>
-            <a:lvl8pPr marL="3200400" indent="0">
-              <a:buNone/>
-              <a:defRPr sz="1600" b="1"/>
+            <a:lvl8pPr marL="1920240" indent="0">
+              <a:buNone/>
+              <a:defRPr sz="960" b="1"/>
             </a:lvl8pPr>
-            <a:lvl9pPr marL="3657600" indent="0">
-              <a:buNone/>
-              <a:defRPr sz="1600" b="1"/>
+            <a:lvl9pPr marL="2194560" indent="0">
+              <a:buNone/>
+              <a:defRPr sz="960" b="1"/>
             </a:lvl9pPr>
           </a:lstStyle>
           <a:p>
@@ -1732,13 +1536,7 @@
       </p:sp>
       <p:sp>
         <p:nvSpPr>
-          <p:cNvPr id="6" name="Content Placeholder 5">
-            <a:extLst>
-              <a:ext uri="{FF2B5EF4-FFF2-40B4-BE49-F238E27FC236}">
-                <a16:creationId xmlns:a16="http://schemas.microsoft.com/office/drawing/2014/main" id="{D3EC8200-9A7A-0B31-B966-B439FB417DDE}"/>
-              </a:ext>
-            </a:extLst>
-          </p:cNvPr>
+          <p:cNvPr id="6" name="Content Placeholder 5"/>
           <p:cNvSpPr>
             <a:spLocks noGrp="1"/>
           </p:cNvSpPr>
@@ -1748,8 +1546,8 @@
         </p:nvSpPr>
         <p:spPr>
           <a:xfrm>
-            <a:off x="6172200" y="2505075"/>
-            <a:ext cx="5183188" cy="3684588"/>
+            <a:off x="6172200" y="1503045"/>
+            <a:ext cx="5183188" cy="2210753"/>
           </a:xfrm>
         </p:spPr>
         <p:txBody>
@@ -1789,18 +1587,13 @@
               <a:rPr lang="en-US"/>
               <a:t>Fifth level</a:t>
             </a:r>
-          </a:p>
-        </p:txBody>
-      </p:sp>
-      <p:sp>
-        <p:nvSpPr>
-          <p:cNvPr id="7" name="Date Placeholder 6">
-            <a:extLst>
-              <a:ext uri="{FF2B5EF4-FFF2-40B4-BE49-F238E27FC236}">
-                <a16:creationId xmlns:a16="http://schemas.microsoft.com/office/drawing/2014/main" id="{5C1909DB-C4D0-7CB4-4212-3FFEF66C5785}"/>
-              </a:ext>
-            </a:extLst>
-          </p:cNvPr>
+            <a:endParaRPr lang="en-US" dirty="0"/>
+          </a:p>
+        </p:txBody>
+      </p:sp>
+      <p:sp>
+        <p:nvSpPr>
+          <p:cNvPr id="7" name="Date Placeholder 6"/>
           <p:cNvSpPr>
             <a:spLocks noGrp="1"/>
           </p:cNvSpPr>
@@ -1815,7 +1608,7 @@
           <a:p>
             <a:fld id="{2F2CB8EC-5C29-448C-8D6A-56E8D36DC34F}" type="datetimeFigureOut">
               <a:rPr lang="en-US" smtClean="0"/>
-              <a:t>3/8/2026</a:t>
+              <a:t>3/11/2026</a:t>
             </a:fld>
             <a:endParaRPr lang="en-US"/>
           </a:p>
@@ -1823,13 +1616,7 @@
       </p:sp>
       <p:sp>
         <p:nvSpPr>
-          <p:cNvPr id="8" name="Footer Placeholder 7">
-            <a:extLst>
-              <a:ext uri="{FF2B5EF4-FFF2-40B4-BE49-F238E27FC236}">
-                <a16:creationId xmlns:a16="http://schemas.microsoft.com/office/drawing/2014/main" id="{CFC0347D-163D-A75C-7CD0-8BBB3C21A7A8}"/>
-              </a:ext>
-            </a:extLst>
-          </p:cNvPr>
+          <p:cNvPr id="8" name="Footer Placeholder 7"/>
           <p:cNvSpPr>
             <a:spLocks noGrp="1"/>
           </p:cNvSpPr>
@@ -1848,13 +1635,7 @@
       </p:sp>
       <p:sp>
         <p:nvSpPr>
-          <p:cNvPr id="9" name="Slide Number Placeholder 8">
-            <a:extLst>
-              <a:ext uri="{FF2B5EF4-FFF2-40B4-BE49-F238E27FC236}">
-                <a16:creationId xmlns:a16="http://schemas.microsoft.com/office/drawing/2014/main" id="{B1BAC736-4149-C293-AFDA-245FF839F348}"/>
-              </a:ext>
-            </a:extLst>
-          </p:cNvPr>
+          <p:cNvPr id="9" name="Slide Number Placeholder 8"/>
           <p:cNvSpPr>
             <a:spLocks noGrp="1"/>
           </p:cNvSpPr>
@@ -1878,7 +1659,7 @@
     </p:spTree>
     <p:extLst>
       <p:ext uri="{BB962C8B-B14F-4D97-AF65-F5344CB8AC3E}">
-        <p14:creationId xmlns:p14="http://schemas.microsoft.com/office/powerpoint/2010/main" val="1581357611"/>
+        <p14:creationId xmlns:p14="http://schemas.microsoft.com/office/powerpoint/2010/main" val="2191728840"/>
       </p:ext>
     </p:extLst>
   </p:cSld>
@@ -1907,13 +1688,7 @@
       </p:grpSpPr>
       <p:sp>
         <p:nvSpPr>
-          <p:cNvPr id="2" name="Title 1">
-            <a:extLst>
-              <a:ext uri="{FF2B5EF4-FFF2-40B4-BE49-F238E27FC236}">
-                <a16:creationId xmlns:a16="http://schemas.microsoft.com/office/drawing/2014/main" id="{9C13393B-00A5-83FA-6BE2-F2861EAAAC97}"/>
-              </a:ext>
-            </a:extLst>
-          </p:cNvPr>
+          <p:cNvPr id="2" name="Title 1"/>
           <p:cNvSpPr>
             <a:spLocks noGrp="1"/>
           </p:cNvSpPr>
@@ -1930,18 +1705,13 @@
               <a:rPr lang="en-US"/>
               <a:t>Click to edit Master title style</a:t>
             </a:r>
-          </a:p>
-        </p:txBody>
-      </p:sp>
-      <p:sp>
-        <p:nvSpPr>
-          <p:cNvPr id="3" name="Date Placeholder 2">
-            <a:extLst>
-              <a:ext uri="{FF2B5EF4-FFF2-40B4-BE49-F238E27FC236}">
-                <a16:creationId xmlns:a16="http://schemas.microsoft.com/office/drawing/2014/main" id="{12E748C6-ECAD-2780-37A2-D861368FC71F}"/>
-              </a:ext>
-            </a:extLst>
-          </p:cNvPr>
+            <a:endParaRPr lang="en-US" dirty="0"/>
+          </a:p>
+        </p:txBody>
+      </p:sp>
+      <p:sp>
+        <p:nvSpPr>
+          <p:cNvPr id="3" name="Date Placeholder 2"/>
           <p:cNvSpPr>
             <a:spLocks noGrp="1"/>
           </p:cNvSpPr>
@@ -1956,7 +1726,7 @@
           <a:p>
             <a:fld id="{2F2CB8EC-5C29-448C-8D6A-56E8D36DC34F}" type="datetimeFigureOut">
               <a:rPr lang="en-US" smtClean="0"/>
-              <a:t>3/8/2026</a:t>
+              <a:t>3/11/2026</a:t>
             </a:fld>
             <a:endParaRPr lang="en-US"/>
           </a:p>
@@ -1964,13 +1734,7 @@
       </p:sp>
       <p:sp>
         <p:nvSpPr>
-          <p:cNvPr id="4" name="Footer Placeholder 3">
-            <a:extLst>
-              <a:ext uri="{FF2B5EF4-FFF2-40B4-BE49-F238E27FC236}">
-                <a16:creationId xmlns:a16="http://schemas.microsoft.com/office/drawing/2014/main" id="{4B055BAA-BFC9-626B-B31C-1172A429B4C0}"/>
-              </a:ext>
-            </a:extLst>
-          </p:cNvPr>
+          <p:cNvPr id="4" name="Footer Placeholder 3"/>
           <p:cNvSpPr>
             <a:spLocks noGrp="1"/>
           </p:cNvSpPr>
@@ -1989,13 +1753,7 @@
       </p:sp>
       <p:sp>
         <p:nvSpPr>
-          <p:cNvPr id="5" name="Slide Number Placeholder 4">
-            <a:extLst>
-              <a:ext uri="{FF2B5EF4-FFF2-40B4-BE49-F238E27FC236}">
-                <a16:creationId xmlns:a16="http://schemas.microsoft.com/office/drawing/2014/main" id="{85DBC092-5D18-0FB0-0328-54DA23CB43EB}"/>
-              </a:ext>
-            </a:extLst>
-          </p:cNvPr>
+          <p:cNvPr id="5" name="Slide Number Placeholder 4"/>
           <p:cNvSpPr>
             <a:spLocks noGrp="1"/>
           </p:cNvSpPr>
@@ -2019,7 +1777,7 @@
     </p:spTree>
     <p:extLst>
       <p:ext uri="{BB962C8B-B14F-4D97-AF65-F5344CB8AC3E}">
-        <p14:creationId xmlns:p14="http://schemas.microsoft.com/office/powerpoint/2010/main" val="4079863721"/>
+        <p14:creationId xmlns:p14="http://schemas.microsoft.com/office/powerpoint/2010/main" val="64208819"/>
       </p:ext>
     </p:extLst>
   </p:cSld>
@@ -2048,13 +1806,7 @@
       </p:grpSpPr>
       <p:sp>
         <p:nvSpPr>
-          <p:cNvPr id="2" name="Date Placeholder 1">
-            <a:extLst>
-              <a:ext uri="{FF2B5EF4-FFF2-40B4-BE49-F238E27FC236}">
-                <a16:creationId xmlns:a16="http://schemas.microsoft.com/office/drawing/2014/main" id="{9810EB7A-6931-70F8-F058-C1F76E0CDB78}"/>
-              </a:ext>
-            </a:extLst>
-          </p:cNvPr>
+          <p:cNvPr id="2" name="Date Placeholder 1"/>
           <p:cNvSpPr>
             <a:spLocks noGrp="1"/>
           </p:cNvSpPr>
@@ -2069,7 +1821,7 @@
           <a:p>
             <a:fld id="{2F2CB8EC-5C29-448C-8D6A-56E8D36DC34F}" type="datetimeFigureOut">
               <a:rPr lang="en-US" smtClean="0"/>
-              <a:t>3/8/2026</a:t>
+              <a:t>3/11/2026</a:t>
             </a:fld>
             <a:endParaRPr lang="en-US"/>
           </a:p>
@@ -2077,13 +1829,7 @@
       </p:sp>
       <p:sp>
         <p:nvSpPr>
-          <p:cNvPr id="3" name="Footer Placeholder 2">
-            <a:extLst>
-              <a:ext uri="{FF2B5EF4-FFF2-40B4-BE49-F238E27FC236}">
-                <a16:creationId xmlns:a16="http://schemas.microsoft.com/office/drawing/2014/main" id="{259225C6-5D70-DB24-862E-80115BDD92D4}"/>
-              </a:ext>
-            </a:extLst>
-          </p:cNvPr>
+          <p:cNvPr id="3" name="Footer Placeholder 2"/>
           <p:cNvSpPr>
             <a:spLocks noGrp="1"/>
           </p:cNvSpPr>
@@ -2102,13 +1848,7 @@
       </p:sp>
       <p:sp>
         <p:nvSpPr>
-          <p:cNvPr id="4" name="Slide Number Placeholder 3">
-            <a:extLst>
-              <a:ext uri="{FF2B5EF4-FFF2-40B4-BE49-F238E27FC236}">
-                <a16:creationId xmlns:a16="http://schemas.microsoft.com/office/drawing/2014/main" id="{11568D9F-3974-382C-C4D3-CB2D51A1E7BD}"/>
-              </a:ext>
-            </a:extLst>
-          </p:cNvPr>
+          <p:cNvPr id="4" name="Slide Number Placeholder 3"/>
           <p:cNvSpPr>
             <a:spLocks noGrp="1"/>
           </p:cNvSpPr>
@@ -2132,7 +1872,7 @@
     </p:spTree>
     <p:extLst>
       <p:ext uri="{BB962C8B-B14F-4D97-AF65-F5344CB8AC3E}">
-        <p14:creationId xmlns:p14="http://schemas.microsoft.com/office/powerpoint/2010/main" val="2997149367"/>
+        <p14:creationId xmlns:p14="http://schemas.microsoft.com/office/powerpoint/2010/main" val="1394076796"/>
       </p:ext>
     </p:extLst>
   </p:cSld>
@@ -2161,13 +1901,7 @@
       </p:grpSpPr>
       <p:sp>
         <p:nvSpPr>
-          <p:cNvPr id="2" name="Title 1">
-            <a:extLst>
-              <a:ext uri="{FF2B5EF4-FFF2-40B4-BE49-F238E27FC236}">
-                <a16:creationId xmlns:a16="http://schemas.microsoft.com/office/drawing/2014/main" id="{C943091E-3DB6-CE3A-1EFE-FC5F62785C28}"/>
-              </a:ext>
-            </a:extLst>
-          </p:cNvPr>
+          <p:cNvPr id="2" name="Title 1"/>
           <p:cNvSpPr>
             <a:spLocks noGrp="1"/>
           </p:cNvSpPr>
@@ -2177,15 +1911,15 @@
         </p:nvSpPr>
         <p:spPr>
           <a:xfrm>
-            <a:off x="839788" y="457200"/>
-            <a:ext cx="3932237" cy="1600200"/>
+            <a:off x="839789" y="274320"/>
+            <a:ext cx="3932237" cy="960120"/>
           </a:xfrm>
         </p:spPr>
         <p:txBody>
           <a:bodyPr anchor="b"/>
           <a:lstStyle>
             <a:lvl1pPr>
-              <a:defRPr sz="3200"/>
+              <a:defRPr sz="1920"/>
             </a:lvl1pPr>
           </a:lstStyle>
           <a:p>
@@ -2193,18 +1927,13 @@
               <a:rPr lang="en-US"/>
               <a:t>Click to edit Master title style</a:t>
             </a:r>
-          </a:p>
-        </p:txBody>
-      </p:sp>
-      <p:sp>
-        <p:nvSpPr>
-          <p:cNvPr id="3" name="Content Placeholder 2">
-            <a:extLst>
-              <a:ext uri="{FF2B5EF4-FFF2-40B4-BE49-F238E27FC236}">
-                <a16:creationId xmlns:a16="http://schemas.microsoft.com/office/drawing/2014/main" id="{EB4BE1AF-78E1-1566-6C84-1D15CE7749B3}"/>
-              </a:ext>
-            </a:extLst>
-          </p:cNvPr>
+            <a:endParaRPr lang="en-US" dirty="0"/>
+          </a:p>
+        </p:txBody>
+      </p:sp>
+      <p:sp>
+        <p:nvSpPr>
+          <p:cNvPr id="3" name="Content Placeholder 2"/>
           <p:cNvSpPr>
             <a:spLocks noGrp="1"/>
           </p:cNvSpPr>
@@ -2214,39 +1943,39 @@
         </p:nvSpPr>
         <p:spPr>
           <a:xfrm>
-            <a:off x="5183188" y="987425"/>
-            <a:ext cx="6172200" cy="4873625"/>
+            <a:off x="5183188" y="592455"/>
+            <a:ext cx="6172200" cy="2924175"/>
           </a:xfrm>
         </p:spPr>
         <p:txBody>
           <a:bodyPr/>
           <a:lstStyle>
             <a:lvl1pPr>
-              <a:defRPr sz="3200"/>
+              <a:defRPr sz="1920"/>
             </a:lvl1pPr>
             <a:lvl2pPr>
-              <a:defRPr sz="2800"/>
+              <a:defRPr sz="1680"/>
             </a:lvl2pPr>
             <a:lvl3pPr>
-              <a:defRPr sz="2400"/>
+              <a:defRPr sz="1440"/>
             </a:lvl3pPr>
             <a:lvl4pPr>
-              <a:defRPr sz="2000"/>
+              <a:defRPr sz="1200"/>
             </a:lvl4pPr>
             <a:lvl5pPr>
-              <a:defRPr sz="2000"/>
+              <a:defRPr sz="1200"/>
             </a:lvl5pPr>
             <a:lvl6pPr>
-              <a:defRPr sz="2000"/>
+              <a:defRPr sz="1200"/>
             </a:lvl6pPr>
             <a:lvl7pPr>
-              <a:defRPr sz="2000"/>
+              <a:defRPr sz="1200"/>
             </a:lvl7pPr>
             <a:lvl8pPr>
-              <a:defRPr sz="2000"/>
+              <a:defRPr sz="1200"/>
             </a:lvl8pPr>
             <a:lvl9pPr>
-              <a:defRPr sz="2000"/>
+              <a:defRPr sz="1200"/>
             </a:lvl9pPr>
           </a:lstStyle>
           <a:p>
@@ -2283,18 +2012,13 @@
               <a:rPr lang="en-US"/>
               <a:t>Fifth level</a:t>
             </a:r>
-          </a:p>
-        </p:txBody>
-      </p:sp>
-      <p:sp>
-        <p:nvSpPr>
-          <p:cNvPr id="4" name="Text Placeholder 3">
-            <a:extLst>
-              <a:ext uri="{FF2B5EF4-FFF2-40B4-BE49-F238E27FC236}">
-                <a16:creationId xmlns:a16="http://schemas.microsoft.com/office/drawing/2014/main" id="{04FAC851-01A3-2D34-8AFD-F1BB7A025085}"/>
-              </a:ext>
-            </a:extLst>
-          </p:cNvPr>
+            <a:endParaRPr lang="en-US" dirty="0"/>
+          </a:p>
+        </p:txBody>
+      </p:sp>
+      <p:sp>
+        <p:nvSpPr>
+          <p:cNvPr id="4" name="Text Placeholder 3"/>
           <p:cNvSpPr>
             <a:spLocks noGrp="1"/>
           </p:cNvSpPr>
@@ -2304,8 +2028,8 @@
         </p:nvSpPr>
         <p:spPr>
           <a:xfrm>
-            <a:off x="839788" y="2057400"/>
-            <a:ext cx="3932237" cy="3811588"/>
+            <a:off x="839789" y="1234440"/>
+            <a:ext cx="3932237" cy="2286953"/>
           </a:xfrm>
         </p:spPr>
         <p:txBody>
@@ -2313,39 +2037,39 @@
           <a:lstStyle>
             <a:lvl1pPr marL="0" indent="0">
               <a:buNone/>
-              <a:defRPr sz="1600"/>
+              <a:defRPr sz="960"/>
             </a:lvl1pPr>
-            <a:lvl2pPr marL="457200" indent="0">
-              <a:buNone/>
-              <a:defRPr sz="1400"/>
+            <a:lvl2pPr marL="274320" indent="0">
+              <a:buNone/>
+              <a:defRPr sz="840"/>
             </a:lvl2pPr>
-            <a:lvl3pPr marL="914400" indent="0">
-              <a:buNone/>
-              <a:defRPr sz="1200"/>
+            <a:lvl3pPr marL="548640" indent="0">
+              <a:buNone/>
+              <a:defRPr sz="720"/>
             </a:lvl3pPr>
-            <a:lvl4pPr marL="1371600" indent="0">
-              <a:buNone/>
-              <a:defRPr sz="1000"/>
+            <a:lvl4pPr marL="822960" indent="0">
+              <a:buNone/>
+              <a:defRPr sz="600"/>
             </a:lvl4pPr>
-            <a:lvl5pPr marL="1828800" indent="0">
-              <a:buNone/>
-              <a:defRPr sz="1000"/>
+            <a:lvl5pPr marL="1097280" indent="0">
+              <a:buNone/>
+              <a:defRPr sz="600"/>
             </a:lvl5pPr>
-            <a:lvl6pPr marL="2286000" indent="0">
-              <a:buNone/>
-              <a:defRPr sz="1000"/>
+            <a:lvl6pPr marL="1371600" indent="0">
+              <a:buNone/>
+              <a:defRPr sz="600"/>
             </a:lvl6pPr>
-            <a:lvl7pPr marL="2743200" indent="0">
-              <a:buNone/>
-              <a:defRPr sz="1000"/>
+            <a:lvl7pPr marL="1645920" indent="0">
+              <a:buNone/>
+              <a:defRPr sz="600"/>
             </a:lvl7pPr>
-            <a:lvl8pPr marL="3200400" indent="0">
-              <a:buNone/>
-              <a:defRPr sz="1000"/>
+            <a:lvl8pPr marL="1920240" indent="0">
+              <a:buNone/>
+              <a:defRPr sz="600"/>
             </a:lvl8pPr>
-            <a:lvl9pPr marL="3657600" indent="0">
-              <a:buNone/>
-              <a:defRPr sz="1000"/>
+            <a:lvl9pPr marL="2194560" indent="0">
+              <a:buNone/>
+              <a:defRPr sz="600"/>
             </a:lvl9pPr>
           </a:lstStyle>
           <a:p>
@@ -2359,13 +2083,7 @@
       </p:sp>
       <p:sp>
         <p:nvSpPr>
-          <p:cNvPr id="5" name="Date Placeholder 4">
-            <a:extLst>
-              <a:ext uri="{FF2B5EF4-FFF2-40B4-BE49-F238E27FC236}">
-                <a16:creationId xmlns:a16="http://schemas.microsoft.com/office/drawing/2014/main" id="{1CE8B885-3C5E-DF58-0815-1FC328431C27}"/>
-              </a:ext>
-            </a:extLst>
-          </p:cNvPr>
+          <p:cNvPr id="5" name="Date Placeholder 4"/>
           <p:cNvSpPr>
             <a:spLocks noGrp="1"/>
           </p:cNvSpPr>
@@ -2380,7 +2098,7 @@
           <a:p>
             <a:fld id="{2F2CB8EC-5C29-448C-8D6A-56E8D36DC34F}" type="datetimeFigureOut">
               <a:rPr lang="en-US" smtClean="0"/>
-              <a:t>3/8/2026</a:t>
+              <a:t>3/11/2026</a:t>
             </a:fld>
             <a:endParaRPr lang="en-US"/>
           </a:p>
@@ -2388,13 +2106,7 @@
       </p:sp>
       <p:sp>
         <p:nvSpPr>
-          <p:cNvPr id="6" name="Footer Placeholder 5">
-            <a:extLst>
-              <a:ext uri="{FF2B5EF4-FFF2-40B4-BE49-F238E27FC236}">
-                <a16:creationId xmlns:a16="http://schemas.microsoft.com/office/drawing/2014/main" id="{9B903E9E-0BD2-FBB8-F394-FAE83DF52E6C}"/>
-              </a:ext>
-            </a:extLst>
-          </p:cNvPr>
+          <p:cNvPr id="6" name="Footer Placeholder 5"/>
           <p:cNvSpPr>
             <a:spLocks noGrp="1"/>
           </p:cNvSpPr>
@@ -2413,13 +2125,7 @@
       </p:sp>
       <p:sp>
         <p:nvSpPr>
-          <p:cNvPr id="7" name="Slide Number Placeholder 6">
-            <a:extLst>
-              <a:ext uri="{FF2B5EF4-FFF2-40B4-BE49-F238E27FC236}">
-                <a16:creationId xmlns:a16="http://schemas.microsoft.com/office/drawing/2014/main" id="{338180E0-8BF1-37A6-556D-1DAF75C89398}"/>
-              </a:ext>
-            </a:extLst>
-          </p:cNvPr>
+          <p:cNvPr id="7" name="Slide Number Placeholder 6"/>
           <p:cNvSpPr>
             <a:spLocks noGrp="1"/>
           </p:cNvSpPr>
@@ -2443,7 +2149,7 @@
     </p:spTree>
     <p:extLst>
       <p:ext uri="{BB962C8B-B14F-4D97-AF65-F5344CB8AC3E}">
-        <p14:creationId xmlns:p14="http://schemas.microsoft.com/office/powerpoint/2010/main" val="151300761"/>
+        <p14:creationId xmlns:p14="http://schemas.microsoft.com/office/powerpoint/2010/main" val="1920996124"/>
       </p:ext>
     </p:extLst>
   </p:cSld>
@@ -2472,13 +2178,7 @@
       </p:grpSpPr>
       <p:sp>
         <p:nvSpPr>
-          <p:cNvPr id="2" name="Title 1">
-            <a:extLst>
-              <a:ext uri="{FF2B5EF4-FFF2-40B4-BE49-F238E27FC236}">
-                <a16:creationId xmlns:a16="http://schemas.microsoft.com/office/drawing/2014/main" id="{F540586D-8AEB-4884-49D7-B38D932EDAC8}"/>
-              </a:ext>
-            </a:extLst>
-          </p:cNvPr>
+          <p:cNvPr id="2" name="Title 1"/>
           <p:cNvSpPr>
             <a:spLocks noGrp="1"/>
           </p:cNvSpPr>
@@ -2488,15 +2188,15 @@
         </p:nvSpPr>
         <p:spPr>
           <a:xfrm>
-            <a:off x="839788" y="457200"/>
-            <a:ext cx="3932237" cy="1600200"/>
+            <a:off x="839789" y="274320"/>
+            <a:ext cx="3932237" cy="960120"/>
           </a:xfrm>
         </p:spPr>
         <p:txBody>
           <a:bodyPr anchor="b"/>
           <a:lstStyle>
             <a:lvl1pPr>
-              <a:defRPr sz="3200"/>
+              <a:defRPr sz="1920"/>
             </a:lvl1pPr>
           </a:lstStyle>
           <a:p>
@@ -2504,20 +2204,15 @@
               <a:rPr lang="en-US"/>
               <a:t>Click to edit Master title style</a:t>
             </a:r>
-          </a:p>
-        </p:txBody>
-      </p:sp>
-      <p:sp>
-        <p:nvSpPr>
-          <p:cNvPr id="3" name="Picture Placeholder 2">
-            <a:extLst>
-              <a:ext uri="{FF2B5EF4-FFF2-40B4-BE49-F238E27FC236}">
-                <a16:creationId xmlns:a16="http://schemas.microsoft.com/office/drawing/2014/main" id="{228D0269-648A-C2FC-F41B-CFDF05BFEE04}"/>
-              </a:ext>
-            </a:extLst>
-          </p:cNvPr>
-          <p:cNvSpPr>
-            <a:spLocks noGrp="1"/>
+            <a:endParaRPr lang="en-US" dirty="0"/>
+          </a:p>
+        </p:txBody>
+      </p:sp>
+      <p:sp>
+        <p:nvSpPr>
+          <p:cNvPr id="3" name="Picture Placeholder 2"/>
+          <p:cNvSpPr>
+            <a:spLocks noGrp="1" noChangeAspect="1"/>
           </p:cNvSpPr>
           <p:nvPr>
             <p:ph type="pic" idx="1"/>
@@ -2525,8 +2220,73 @@
         </p:nvSpPr>
         <p:spPr>
           <a:xfrm>
-            <a:off x="5183188" y="987425"/>
-            <a:ext cx="6172200" cy="4873625"/>
+            <a:off x="5183188" y="592455"/>
+            <a:ext cx="6172200" cy="2924175"/>
+          </a:xfrm>
+        </p:spPr>
+        <p:txBody>
+          <a:bodyPr anchor="t"/>
+          <a:lstStyle>
+            <a:lvl1pPr marL="0" indent="0">
+              <a:buNone/>
+              <a:defRPr sz="1920"/>
+            </a:lvl1pPr>
+            <a:lvl2pPr marL="274320" indent="0">
+              <a:buNone/>
+              <a:defRPr sz="1680"/>
+            </a:lvl2pPr>
+            <a:lvl3pPr marL="548640" indent="0">
+              <a:buNone/>
+              <a:defRPr sz="1440"/>
+            </a:lvl3pPr>
+            <a:lvl4pPr marL="822960" indent="0">
+              <a:buNone/>
+              <a:defRPr sz="1200"/>
+            </a:lvl4pPr>
+            <a:lvl5pPr marL="1097280" indent="0">
+              <a:buNone/>
+              <a:defRPr sz="1200"/>
+            </a:lvl5pPr>
+            <a:lvl6pPr marL="1371600" indent="0">
+              <a:buNone/>
+              <a:defRPr sz="1200"/>
+            </a:lvl6pPr>
+            <a:lvl7pPr marL="1645920" indent="0">
+              <a:buNone/>
+              <a:defRPr sz="1200"/>
+            </a:lvl7pPr>
+            <a:lvl8pPr marL="1920240" indent="0">
+              <a:buNone/>
+              <a:defRPr sz="1200"/>
+            </a:lvl8pPr>
+            <a:lvl9pPr marL="2194560" indent="0">
+              <a:buNone/>
+              <a:defRPr sz="1200"/>
+            </a:lvl9pPr>
+          </a:lstStyle>
+          <a:p>
+            <a:r>
+              <a:rPr lang="en-US"/>
+              <a:t>Click icon to add picture</a:t>
+            </a:r>
+            <a:endParaRPr lang="en-US" dirty="0"/>
+          </a:p>
+        </p:txBody>
+      </p:sp>
+      <p:sp>
+        <p:nvSpPr>
+          <p:cNvPr id="4" name="Text Placeholder 3"/>
+          <p:cNvSpPr>
+            <a:spLocks noGrp="1"/>
+          </p:cNvSpPr>
+          <p:nvPr>
+            <p:ph type="body" sz="half" idx="2"/>
+          </p:nvPr>
+        </p:nvSpPr>
+        <p:spPr>
+          <a:xfrm>
+            <a:off x="839789" y="1234440"/>
+            <a:ext cx="3932237" cy="2286953"/>
           </a:xfrm>
         </p:spPr>
         <p:txBody>
@@ -2534,109 +2294,42 @@
           <a:lstStyle>
             <a:lvl1pPr marL="0" indent="0">
               <a:buNone/>
-              <a:defRPr sz="3200"/>
+              <a:defRPr sz="960"/>
             </a:lvl1pPr>
-            <a:lvl2pPr marL="457200" indent="0">
-              <a:buNone/>
-              <a:defRPr sz="2800"/>
+            <a:lvl2pPr marL="274320" indent="0">
+              <a:buNone/>
+              <a:defRPr sz="840"/>
             </a:lvl2pPr>
-            <a:lvl3pPr marL="914400" indent="0">
-              <a:buNone/>
-              <a:defRPr sz="2400"/>
+            <a:lvl3pPr marL="548640" indent="0">
+              <a:buNone/>
+              <a:defRPr sz="720"/>
             </a:lvl3pPr>
-            <a:lvl4pPr marL="1371600" indent="0">
-              <a:buNone/>
-              <a:defRPr sz="2000"/>
+            <a:lvl4pPr marL="822960" indent="0">
+              <a:buNone/>
+              <a:defRPr sz="600"/>
             </a:lvl4pPr>
-            <a:lvl5pPr marL="1828800" indent="0">
-              <a:buNone/>
-              <a:defRPr sz="2000"/>
+            <a:lvl5pPr marL="1097280" indent="0">
+              <a:buNone/>
+              <a:defRPr sz="600"/>
             </a:lvl5pPr>
-            <a:lvl6pPr marL="2286000" indent="0">
-              <a:buNone/>
-              <a:defRPr sz="2000"/>
+            <a:lvl6pPr marL="1371600" indent="0">
+              <a:buNone/>
+              <a:defRPr sz="600"/>
             </a:lvl6pPr>
-            <a:lvl7pPr marL="2743200" indent="0">
-              <a:buNone/>
-              <a:defRPr sz="2000"/>
+            <a:lvl7pPr marL="1645920" indent="0">
+              <a:buNone/>
+              <a:defRPr sz="600"/>
             </a:lvl7pPr>
-            <a:lvl8pPr marL="3200400" indent="0">
-              <a:buNone/>
-              <a:defRPr sz="2000"/>
+            <a:lvl8pPr marL="1920240" indent="0">
+              <a:buNone/>
+              <a:defRPr sz="600"/>
             </a:lvl8pPr>
-            <a:lvl9pPr marL="3657600" indent="0">
-              <a:buNone/>
-              <a:defRPr sz="2000"/>
+            <a:lvl9pPr marL="2194560" indent="0">
+              <a:buNone/>
+              <a:defRPr sz="600"/>
             </a:lvl9pPr>
           </a:lstStyle>
           <a:p>
-            <a:endParaRPr lang="en-US"/>
-          </a:p>
-        </p:txBody>
-      </p:sp>
-      <p:sp>
-        <p:nvSpPr>
-          <p:cNvPr id="4" name="Text Placeholder 3">
-            <a:extLst>
-              <a:ext uri="{FF2B5EF4-FFF2-40B4-BE49-F238E27FC236}">
-                <a16:creationId xmlns:a16="http://schemas.microsoft.com/office/drawing/2014/main" id="{1176A9C0-C513-8289-E0BE-454DED9E7789}"/>
-              </a:ext>
-            </a:extLst>
-          </p:cNvPr>
-          <p:cNvSpPr>
-            <a:spLocks noGrp="1"/>
-          </p:cNvSpPr>
-          <p:nvPr>
-            <p:ph type="body" sz="half" idx="2"/>
-          </p:nvPr>
-        </p:nvSpPr>
-        <p:spPr>
-          <a:xfrm>
-            <a:off x="839788" y="2057400"/>
-            <a:ext cx="3932237" cy="3811588"/>
-          </a:xfrm>
-        </p:spPr>
-        <p:txBody>
-          <a:bodyPr/>
-          <a:lstStyle>
-            <a:lvl1pPr marL="0" indent="0">
-              <a:buNone/>
-              <a:defRPr sz="1600"/>
-            </a:lvl1pPr>
-            <a:lvl2pPr marL="457200" indent="0">
-              <a:buNone/>
-              <a:defRPr sz="1400"/>
-            </a:lvl2pPr>
-            <a:lvl3pPr marL="914400" indent="0">
-              <a:buNone/>
-              <a:defRPr sz="1200"/>
-            </a:lvl3pPr>
-            <a:lvl4pPr marL="1371600" indent="0">
-              <a:buNone/>
-              <a:defRPr sz="1000"/>
-            </a:lvl4pPr>
-            <a:lvl5pPr marL="1828800" indent="0">
-              <a:buNone/>
-              <a:defRPr sz="1000"/>
-            </a:lvl5pPr>
-            <a:lvl6pPr marL="2286000" indent="0">
-              <a:buNone/>
-              <a:defRPr sz="1000"/>
-            </a:lvl6pPr>
-            <a:lvl7pPr marL="2743200" indent="0">
-              <a:buNone/>
-              <a:defRPr sz="1000"/>
-            </a:lvl7pPr>
-            <a:lvl8pPr marL="3200400" indent="0">
-              <a:buNone/>
-              <a:defRPr sz="1000"/>
-            </a:lvl8pPr>
-            <a:lvl9pPr marL="3657600" indent="0">
-              <a:buNone/>
-              <a:defRPr sz="1000"/>
-            </a:lvl9pPr>
-          </a:lstStyle>
-          <a:p>
             <a:pPr lvl="0"/>
             <a:r>
               <a:rPr lang="en-US"/>
@@ -2647,13 +2340,7 @@
       </p:sp>
       <p:sp>
         <p:nvSpPr>
-          <p:cNvPr id="5" name="Date Placeholder 4">
-            <a:extLst>
-              <a:ext uri="{FF2B5EF4-FFF2-40B4-BE49-F238E27FC236}">
-                <a16:creationId xmlns:a16="http://schemas.microsoft.com/office/drawing/2014/main" id="{DACAD512-0B01-62D0-6BB9-A64ACBEF9D80}"/>
-              </a:ext>
-            </a:extLst>
-          </p:cNvPr>
+          <p:cNvPr id="5" name="Date Placeholder 4"/>
           <p:cNvSpPr>
             <a:spLocks noGrp="1"/>
           </p:cNvSpPr>
@@ -2668,7 +2355,7 @@
           <a:p>
             <a:fld id="{2F2CB8EC-5C29-448C-8D6A-56E8D36DC34F}" type="datetimeFigureOut">
               <a:rPr lang="en-US" smtClean="0"/>
-              <a:t>3/8/2026</a:t>
+              <a:t>3/11/2026</a:t>
             </a:fld>
             <a:endParaRPr lang="en-US"/>
           </a:p>
@@ -2676,13 +2363,7 @@
       </p:sp>
       <p:sp>
         <p:nvSpPr>
-          <p:cNvPr id="6" name="Footer Placeholder 5">
-            <a:extLst>
-              <a:ext uri="{FF2B5EF4-FFF2-40B4-BE49-F238E27FC236}">
-                <a16:creationId xmlns:a16="http://schemas.microsoft.com/office/drawing/2014/main" id="{FD85263B-DDF2-E96A-36C0-2A65C0892BE2}"/>
-              </a:ext>
-            </a:extLst>
-          </p:cNvPr>
+          <p:cNvPr id="6" name="Footer Placeholder 5"/>
           <p:cNvSpPr>
             <a:spLocks noGrp="1"/>
           </p:cNvSpPr>
@@ -2701,13 +2382,7 @@
       </p:sp>
       <p:sp>
         <p:nvSpPr>
-          <p:cNvPr id="7" name="Slide Number Placeholder 6">
-            <a:extLst>
-              <a:ext uri="{FF2B5EF4-FFF2-40B4-BE49-F238E27FC236}">
-                <a16:creationId xmlns:a16="http://schemas.microsoft.com/office/drawing/2014/main" id="{C4B29FB5-A7A8-1E19-53B7-8D1E988D2285}"/>
-              </a:ext>
-            </a:extLst>
-          </p:cNvPr>
+          <p:cNvPr id="7" name="Slide Number Placeholder 6"/>
           <p:cNvSpPr>
             <a:spLocks noGrp="1"/>
           </p:cNvSpPr>
@@ -2731,7 +2406,7 @@
     </p:spTree>
     <p:extLst>
       <p:ext uri="{BB962C8B-B14F-4D97-AF65-F5344CB8AC3E}">
-        <p14:creationId xmlns:p14="http://schemas.microsoft.com/office/powerpoint/2010/main" val="3490848007"/>
+        <p14:creationId xmlns:p14="http://schemas.microsoft.com/office/powerpoint/2010/main" val="3590429669"/>
       </p:ext>
     </p:extLst>
   </p:cSld>
@@ -2765,13 +2440,7 @@
       </p:grpSpPr>
       <p:sp>
         <p:nvSpPr>
-          <p:cNvPr id="2" name="Title Placeholder 1">
-            <a:extLst>
-              <a:ext uri="{FF2B5EF4-FFF2-40B4-BE49-F238E27FC236}">
-                <a16:creationId xmlns:a16="http://schemas.microsoft.com/office/drawing/2014/main" id="{A9669CE1-0455-5B76-E705-995E6C3C5C21}"/>
-              </a:ext>
-            </a:extLst>
-          </p:cNvPr>
+          <p:cNvPr id="2" name="Title Placeholder 1"/>
           <p:cNvSpPr>
             <a:spLocks noGrp="1"/>
           </p:cNvSpPr>
@@ -2781,8 +2450,8 @@
         </p:nvSpPr>
         <p:spPr>
           <a:xfrm>
-            <a:off x="838200" y="365125"/>
-            <a:ext cx="10515600" cy="1325563"/>
+            <a:off x="838200" y="219075"/>
+            <a:ext cx="10515600" cy="795338"/>
           </a:xfrm>
           <a:prstGeom prst="rect">
             <a:avLst/>
@@ -2798,18 +2467,13 @@
               <a:rPr lang="en-US"/>
               <a:t>Click to edit Master title style</a:t>
             </a:r>
-          </a:p>
-        </p:txBody>
-      </p:sp>
-      <p:sp>
-        <p:nvSpPr>
-          <p:cNvPr id="3" name="Text Placeholder 2">
-            <a:extLst>
-              <a:ext uri="{FF2B5EF4-FFF2-40B4-BE49-F238E27FC236}">
-                <a16:creationId xmlns:a16="http://schemas.microsoft.com/office/drawing/2014/main" id="{734A87FF-C67C-ADE9-4FFB-9C37D4BC3B81}"/>
-              </a:ext>
-            </a:extLst>
-          </p:cNvPr>
+            <a:endParaRPr lang="en-US" dirty="0"/>
+          </a:p>
+        </p:txBody>
+      </p:sp>
+      <p:sp>
+        <p:nvSpPr>
+          <p:cNvPr id="3" name="Text Placeholder 2"/>
           <p:cNvSpPr>
             <a:spLocks noGrp="1"/>
           </p:cNvSpPr>
@@ -2819,8 +2483,8 @@
         </p:nvSpPr>
         <p:spPr>
           <a:xfrm>
-            <a:off x="838200" y="1825625"/>
-            <a:ext cx="10515600" cy="4351338"/>
+            <a:off x="838200" y="1095375"/>
+            <a:ext cx="10515600" cy="2610803"/>
           </a:xfrm>
           <a:prstGeom prst="rect">
             <a:avLst/>
@@ -2865,18 +2529,13 @@
               <a:rPr lang="en-US"/>
               <a:t>Fifth level</a:t>
             </a:r>
-          </a:p>
-        </p:txBody>
-      </p:sp>
-      <p:sp>
-        <p:nvSpPr>
-          <p:cNvPr id="4" name="Date Placeholder 3">
-            <a:extLst>
-              <a:ext uri="{FF2B5EF4-FFF2-40B4-BE49-F238E27FC236}">
-                <a16:creationId xmlns:a16="http://schemas.microsoft.com/office/drawing/2014/main" id="{4D31B7C2-8E23-0C43-68DB-622A738AE723}"/>
-              </a:ext>
-            </a:extLst>
-          </p:cNvPr>
+            <a:endParaRPr lang="en-US" dirty="0"/>
+          </a:p>
+        </p:txBody>
+      </p:sp>
+      <p:sp>
+        <p:nvSpPr>
+          <p:cNvPr id="4" name="Date Placeholder 3"/>
           <p:cNvSpPr>
             <a:spLocks noGrp="1"/>
           </p:cNvSpPr>
@@ -2886,8 +2545,8 @@
         </p:nvSpPr>
         <p:spPr>
           <a:xfrm>
-            <a:off x="838200" y="6356350"/>
-            <a:ext cx="2743200" cy="365125"/>
+            <a:off x="838200" y="3813810"/>
+            <a:ext cx="2743200" cy="219075"/>
           </a:xfrm>
           <a:prstGeom prst="rect">
             <a:avLst/>
@@ -2897,7 +2556,7 @@
           <a:bodyPr vert="horz" lIns="91440" tIns="45720" rIns="91440" bIns="45720" rtlCol="0" anchor="ctr"/>
           <a:lstStyle>
             <a:lvl1pPr algn="l">
-              <a:defRPr sz="1200">
+              <a:defRPr sz="720">
                 <a:solidFill>
                   <a:schemeClr val="tx1">
                     <a:tint val="82000"/>
@@ -2909,7 +2568,7 @@
           <a:p>
             <a:fld id="{2F2CB8EC-5C29-448C-8D6A-56E8D36DC34F}" type="datetimeFigureOut">
               <a:rPr lang="en-US" smtClean="0"/>
-              <a:t>3/8/2026</a:t>
+              <a:t>3/11/2026</a:t>
             </a:fld>
             <a:endParaRPr lang="en-US"/>
           </a:p>
@@ -2917,13 +2576,7 @@
       </p:sp>
       <p:sp>
         <p:nvSpPr>
-          <p:cNvPr id="5" name="Footer Placeholder 4">
-            <a:extLst>
-              <a:ext uri="{FF2B5EF4-FFF2-40B4-BE49-F238E27FC236}">
-                <a16:creationId xmlns:a16="http://schemas.microsoft.com/office/drawing/2014/main" id="{562EA4E9-8DE9-6208-3CF1-E801C919841B}"/>
-              </a:ext>
-            </a:extLst>
-          </p:cNvPr>
+          <p:cNvPr id="5" name="Footer Placeholder 4"/>
           <p:cNvSpPr>
             <a:spLocks noGrp="1"/>
           </p:cNvSpPr>
@@ -2933,8 +2586,8 @@
         </p:nvSpPr>
         <p:spPr>
           <a:xfrm>
-            <a:off x="4038600" y="6356350"/>
-            <a:ext cx="4114800" cy="365125"/>
+            <a:off x="4038600" y="3813810"/>
+            <a:ext cx="4114800" cy="219075"/>
           </a:xfrm>
           <a:prstGeom prst="rect">
             <a:avLst/>
@@ -2944,7 +2597,7 @@
           <a:bodyPr vert="horz" lIns="91440" tIns="45720" rIns="91440" bIns="45720" rtlCol="0" anchor="ctr"/>
           <a:lstStyle>
             <a:lvl1pPr algn="ctr">
-              <a:defRPr sz="1200">
+              <a:defRPr sz="720">
                 <a:solidFill>
                   <a:schemeClr val="tx1">
                     <a:tint val="82000"/>
@@ -2960,13 +2613,7 @@
       </p:sp>
       <p:sp>
         <p:nvSpPr>
-          <p:cNvPr id="6" name="Slide Number Placeholder 5">
-            <a:extLst>
-              <a:ext uri="{FF2B5EF4-FFF2-40B4-BE49-F238E27FC236}">
-                <a16:creationId xmlns:a16="http://schemas.microsoft.com/office/drawing/2014/main" id="{EAA35A1F-733A-32CA-15E0-59470C16F79E}"/>
-              </a:ext>
-            </a:extLst>
-          </p:cNvPr>
+          <p:cNvPr id="6" name="Slide Number Placeholder 5"/>
           <p:cNvSpPr>
             <a:spLocks noGrp="1"/>
           </p:cNvSpPr>
@@ -2976,8 +2623,8 @@
         </p:nvSpPr>
         <p:spPr>
           <a:xfrm>
-            <a:off x="8610600" y="6356350"/>
-            <a:ext cx="2743200" cy="365125"/>
+            <a:off x="8610600" y="3813810"/>
+            <a:ext cx="2743200" cy="219075"/>
           </a:xfrm>
           <a:prstGeom prst="rect">
             <a:avLst/>
@@ -2987,7 +2634,7 @@
           <a:bodyPr vert="horz" lIns="91440" tIns="45720" rIns="91440" bIns="45720" rtlCol="0" anchor="ctr"/>
           <a:lstStyle>
             <a:lvl1pPr algn="r">
-              <a:defRPr sz="1200">
+              <a:defRPr sz="720">
                 <a:solidFill>
                   <a:schemeClr val="tx1">
                     <a:tint val="82000"/>
@@ -3008,27 +2655,27 @@
     </p:spTree>
     <p:extLst>
       <p:ext uri="{BB962C8B-B14F-4D97-AF65-F5344CB8AC3E}">
-        <p14:creationId xmlns:p14="http://schemas.microsoft.com/office/powerpoint/2010/main" val="3509381854"/>
+        <p14:creationId xmlns:p14="http://schemas.microsoft.com/office/powerpoint/2010/main" val="2135564580"/>
       </p:ext>
     </p:extLst>
   </p:cSld>
   <p:clrMap bg1="lt1" tx1="dk1" bg2="lt2" tx2="dk2" accent1="accent1" accent2="accent2" accent3="accent3" accent4="accent4" accent5="accent5" accent6="accent6" hlink="hlink" folHlink="folHlink"/>
   <p:sldLayoutIdLst>
-    <p:sldLayoutId id="2147483649" r:id="rId1"/>
-    <p:sldLayoutId id="2147483650" r:id="rId2"/>
-    <p:sldLayoutId id="2147483651" r:id="rId3"/>
-    <p:sldLayoutId id="2147483652" r:id="rId4"/>
-    <p:sldLayoutId id="2147483653" r:id="rId5"/>
-    <p:sldLayoutId id="2147483654" r:id="rId6"/>
-    <p:sldLayoutId id="2147483655" r:id="rId7"/>
-    <p:sldLayoutId id="2147483656" r:id="rId8"/>
-    <p:sldLayoutId id="2147483657" r:id="rId9"/>
-    <p:sldLayoutId id="2147483658" r:id="rId10"/>
-    <p:sldLayoutId id="2147483659" r:id="rId11"/>
+    <p:sldLayoutId id="2147483673" r:id="rId1"/>
+    <p:sldLayoutId id="2147483674" r:id="rId2"/>
+    <p:sldLayoutId id="2147483675" r:id="rId3"/>
+    <p:sldLayoutId id="2147483676" r:id="rId4"/>
+    <p:sldLayoutId id="2147483677" r:id="rId5"/>
+    <p:sldLayoutId id="2147483678" r:id="rId6"/>
+    <p:sldLayoutId id="2147483679" r:id="rId7"/>
+    <p:sldLayoutId id="2147483680" r:id="rId8"/>
+    <p:sldLayoutId id="2147483681" r:id="rId9"/>
+    <p:sldLayoutId id="2147483682" r:id="rId10"/>
+    <p:sldLayoutId id="2147483683" r:id="rId11"/>
   </p:sldLayoutIdLst>
   <p:txStyles>
     <p:titleStyle>
-      <a:lvl1pPr algn="l" defTabSz="914400" rtl="0" eaLnBrk="1" latinLnBrk="0" hangingPunct="1">
+      <a:lvl1pPr algn="l" defTabSz="548640" rtl="0" eaLnBrk="1" latinLnBrk="0" hangingPunct="1">
         <a:lnSpc>
           <a:spcPct val="90000"/>
         </a:lnSpc>
@@ -3036,7 +2683,7 @@
           <a:spcPct val="0"/>
         </a:spcBef>
         <a:buNone/>
-        <a:defRPr sz="4400" kern="1200">
+        <a:defRPr sz="2640" kern="1200">
           <a:solidFill>
             <a:schemeClr val="tx1"/>
           </a:solidFill>
@@ -3047,16 +2694,16 @@
       </a:lvl1pPr>
     </p:titleStyle>
     <p:bodyStyle>
-      <a:lvl1pPr marL="228600" indent="-228600" algn="l" defTabSz="914400" rtl="0" eaLnBrk="1" latinLnBrk="0" hangingPunct="1">
+      <a:lvl1pPr marL="137160" indent="-137160" algn="l" defTabSz="548640" rtl="0" eaLnBrk="1" latinLnBrk="0" hangingPunct="1">
         <a:lnSpc>
           <a:spcPct val="90000"/>
         </a:lnSpc>
         <a:spcBef>
-          <a:spcPts val="1000"/>
+          <a:spcPts val="600"/>
         </a:spcBef>
         <a:buFont typeface="Arial" panose="020B0604020202020204" pitchFamily="34" charset="0"/>
         <a:buChar char="•"/>
-        <a:defRPr sz="2800" kern="1200">
+        <a:defRPr sz="1680" kern="1200">
           <a:solidFill>
             <a:schemeClr val="tx1"/>
           </a:solidFill>
@@ -3065,16 +2712,16 @@
           <a:cs typeface="+mn-cs"/>
         </a:defRPr>
       </a:lvl1pPr>
-      <a:lvl2pPr marL="685800" indent="-228600" algn="l" defTabSz="914400" rtl="0" eaLnBrk="1" latinLnBrk="0" hangingPunct="1">
+      <a:lvl2pPr marL="411480" indent="-137160" algn="l" defTabSz="548640" rtl="0" eaLnBrk="1" latinLnBrk="0" hangingPunct="1">
         <a:lnSpc>
           <a:spcPct val="90000"/>
         </a:lnSpc>
         <a:spcBef>
-          <a:spcPts val="500"/>
+          <a:spcPts val="300"/>
         </a:spcBef>
         <a:buFont typeface="Arial" panose="020B0604020202020204" pitchFamily="34" charset="0"/>
         <a:buChar char="•"/>
-        <a:defRPr sz="2400" kern="1200">
+        <a:defRPr sz="1440" kern="1200">
           <a:solidFill>
             <a:schemeClr val="tx1"/>
           </a:solidFill>
@@ -3083,16 +2730,16 @@
           <a:cs typeface="+mn-cs"/>
         </a:defRPr>
       </a:lvl2pPr>
-      <a:lvl3pPr marL="1143000" indent="-228600" algn="l" defTabSz="914400" rtl="0" eaLnBrk="1" latinLnBrk="0" hangingPunct="1">
+      <a:lvl3pPr marL="685800" indent="-137160" algn="l" defTabSz="548640" rtl="0" eaLnBrk="1" latinLnBrk="0" hangingPunct="1">
         <a:lnSpc>
           <a:spcPct val="90000"/>
         </a:lnSpc>
         <a:spcBef>
-          <a:spcPts val="500"/>
+          <a:spcPts val="300"/>
         </a:spcBef>
         <a:buFont typeface="Arial" panose="020B0604020202020204" pitchFamily="34" charset="0"/>
         <a:buChar char="•"/>
-        <a:defRPr sz="2000" kern="1200">
+        <a:defRPr sz="1200" kern="1200">
           <a:solidFill>
             <a:schemeClr val="tx1"/>
           </a:solidFill>
@@ -3101,16 +2748,16 @@
           <a:cs typeface="+mn-cs"/>
         </a:defRPr>
       </a:lvl3pPr>
-      <a:lvl4pPr marL="1600200" indent="-228600" algn="l" defTabSz="914400" rtl="0" eaLnBrk="1" latinLnBrk="0" hangingPunct="1">
+      <a:lvl4pPr marL="960120" indent="-137160" algn="l" defTabSz="548640" rtl="0" eaLnBrk="1" latinLnBrk="0" hangingPunct="1">
         <a:lnSpc>
           <a:spcPct val="90000"/>
         </a:lnSpc>
         <a:spcBef>
-          <a:spcPts val="500"/>
+          <a:spcPts val="300"/>
         </a:spcBef>
         <a:buFont typeface="Arial" panose="020B0604020202020204" pitchFamily="34" charset="0"/>
         <a:buChar char="•"/>
-        <a:defRPr sz="1800" kern="1200">
+        <a:defRPr sz="1080" kern="1200">
           <a:solidFill>
             <a:schemeClr val="tx1"/>
           </a:solidFill>
@@ -3119,16 +2766,16 @@
           <a:cs typeface="+mn-cs"/>
         </a:defRPr>
       </a:lvl4pPr>
-      <a:lvl5pPr marL="2057400" indent="-228600" algn="l" defTabSz="914400" rtl="0" eaLnBrk="1" latinLnBrk="0" hangingPunct="1">
+      <a:lvl5pPr marL="1234440" indent="-137160" algn="l" defTabSz="548640" rtl="0" eaLnBrk="1" latinLnBrk="0" hangingPunct="1">
         <a:lnSpc>
           <a:spcPct val="90000"/>
         </a:lnSpc>
         <a:spcBef>
-          <a:spcPts val="500"/>
+          <a:spcPts val="300"/>
         </a:spcBef>
         <a:buFont typeface="Arial" panose="020B0604020202020204" pitchFamily="34" charset="0"/>
         <a:buChar char="•"/>
-        <a:defRPr sz="1800" kern="1200">
+        <a:defRPr sz="1080" kern="1200">
           <a:solidFill>
             <a:schemeClr val="tx1"/>
           </a:solidFill>
@@ -3137,16 +2784,16 @@
           <a:cs typeface="+mn-cs"/>
         </a:defRPr>
       </a:lvl5pPr>
-      <a:lvl6pPr marL="2514600" indent="-228600" algn="l" defTabSz="914400" rtl="0" eaLnBrk="1" latinLnBrk="0" hangingPunct="1">
+      <a:lvl6pPr marL="1508760" indent="-137160" algn="l" defTabSz="548640" rtl="0" eaLnBrk="1" latinLnBrk="0" hangingPunct="1">
         <a:lnSpc>
           <a:spcPct val="90000"/>
         </a:lnSpc>
         <a:spcBef>
-          <a:spcPts val="500"/>
+          <a:spcPts val="300"/>
         </a:spcBef>
         <a:buFont typeface="Arial" panose="020B0604020202020204" pitchFamily="34" charset="0"/>
         <a:buChar char="•"/>
-        <a:defRPr sz="1800" kern="1200">
+        <a:defRPr sz="1080" kern="1200">
           <a:solidFill>
             <a:schemeClr val="tx1"/>
           </a:solidFill>
@@ -3155,16 +2802,16 @@
           <a:cs typeface="+mn-cs"/>
         </a:defRPr>
       </a:lvl6pPr>
-      <a:lvl7pPr marL="2971800" indent="-228600" algn="l" defTabSz="914400" rtl="0" eaLnBrk="1" latinLnBrk="0" hangingPunct="1">
+      <a:lvl7pPr marL="1783080" indent="-137160" algn="l" defTabSz="548640" rtl="0" eaLnBrk="1" latinLnBrk="0" hangingPunct="1">
         <a:lnSpc>
           <a:spcPct val="90000"/>
         </a:lnSpc>
         <a:spcBef>
-          <a:spcPts val="500"/>
+          <a:spcPts val="300"/>
         </a:spcBef>
         <a:buFont typeface="Arial" panose="020B0604020202020204" pitchFamily="34" charset="0"/>
         <a:buChar char="•"/>
-        <a:defRPr sz="1800" kern="1200">
+        <a:defRPr sz="1080" kern="1200">
           <a:solidFill>
             <a:schemeClr val="tx1"/>
           </a:solidFill>
@@ -3173,16 +2820,16 @@
           <a:cs typeface="+mn-cs"/>
         </a:defRPr>
       </a:lvl7pPr>
-      <a:lvl8pPr marL="3429000" indent="-228600" algn="l" defTabSz="914400" rtl="0" eaLnBrk="1" latinLnBrk="0" hangingPunct="1">
+      <a:lvl8pPr marL="2057400" indent="-137160" algn="l" defTabSz="548640" rtl="0" eaLnBrk="1" latinLnBrk="0" hangingPunct="1">
         <a:lnSpc>
           <a:spcPct val="90000"/>
         </a:lnSpc>
         <a:spcBef>
-          <a:spcPts val="500"/>
+          <a:spcPts val="300"/>
         </a:spcBef>
         <a:buFont typeface="Arial" panose="020B0604020202020204" pitchFamily="34" charset="0"/>
         <a:buChar char="•"/>
-        <a:defRPr sz="1800" kern="1200">
+        <a:defRPr sz="1080" kern="1200">
           <a:solidFill>
             <a:schemeClr val="tx1"/>
           </a:solidFill>
@@ -3191,16 +2838,16 @@
           <a:cs typeface="+mn-cs"/>
         </a:defRPr>
       </a:lvl8pPr>
-      <a:lvl9pPr marL="3886200" indent="-228600" algn="l" defTabSz="914400" rtl="0" eaLnBrk="1" latinLnBrk="0" hangingPunct="1">
+      <a:lvl9pPr marL="2331720" indent="-137160" algn="l" defTabSz="548640" rtl="0" eaLnBrk="1" latinLnBrk="0" hangingPunct="1">
         <a:lnSpc>
           <a:spcPct val="90000"/>
         </a:lnSpc>
         <a:spcBef>
-          <a:spcPts val="500"/>
+          <a:spcPts val="300"/>
         </a:spcBef>
         <a:buFont typeface="Arial" panose="020B0604020202020204" pitchFamily="34" charset="0"/>
         <a:buChar char="•"/>
-        <a:defRPr sz="1800" kern="1200">
+        <a:defRPr sz="1080" kern="1200">
           <a:solidFill>
             <a:schemeClr val="tx1"/>
           </a:solidFill>
@@ -3214,8 +2861,8 @@
       <a:defPPr>
         <a:defRPr lang="en-US"/>
       </a:defPPr>
-      <a:lvl1pPr marL="0" algn="l" defTabSz="914400" rtl="0" eaLnBrk="1" latinLnBrk="0" hangingPunct="1">
-        <a:defRPr sz="1800" kern="1200">
+      <a:lvl1pPr marL="0" algn="l" defTabSz="548640" rtl="0" eaLnBrk="1" latinLnBrk="0" hangingPunct="1">
+        <a:defRPr sz="1080" kern="1200">
           <a:solidFill>
             <a:schemeClr val="tx1"/>
           </a:solidFill>
@@ -3224,8 +2871,8 @@
           <a:cs typeface="+mn-cs"/>
         </a:defRPr>
       </a:lvl1pPr>
-      <a:lvl2pPr marL="457200" algn="l" defTabSz="914400" rtl="0" eaLnBrk="1" latinLnBrk="0" hangingPunct="1">
-        <a:defRPr sz="1800" kern="1200">
+      <a:lvl2pPr marL="274320" algn="l" defTabSz="548640" rtl="0" eaLnBrk="1" latinLnBrk="0" hangingPunct="1">
+        <a:defRPr sz="1080" kern="1200">
           <a:solidFill>
             <a:schemeClr val="tx1"/>
           </a:solidFill>
@@ -3234,8 +2881,8 @@
           <a:cs typeface="+mn-cs"/>
         </a:defRPr>
       </a:lvl2pPr>
-      <a:lvl3pPr marL="914400" algn="l" defTabSz="914400" rtl="0" eaLnBrk="1" latinLnBrk="0" hangingPunct="1">
-        <a:defRPr sz="1800" kern="1200">
+      <a:lvl3pPr marL="548640" algn="l" defTabSz="548640" rtl="0" eaLnBrk="1" latinLnBrk="0" hangingPunct="1">
+        <a:defRPr sz="1080" kern="1200">
           <a:solidFill>
             <a:schemeClr val="tx1"/>
           </a:solidFill>
@@ -3244,8 +2891,8 @@
           <a:cs typeface="+mn-cs"/>
         </a:defRPr>
       </a:lvl3pPr>
-      <a:lvl4pPr marL="1371600" algn="l" defTabSz="914400" rtl="0" eaLnBrk="1" latinLnBrk="0" hangingPunct="1">
-        <a:defRPr sz="1800" kern="1200">
+      <a:lvl4pPr marL="822960" algn="l" defTabSz="548640" rtl="0" eaLnBrk="1" latinLnBrk="0" hangingPunct="1">
+        <a:defRPr sz="1080" kern="1200">
           <a:solidFill>
             <a:schemeClr val="tx1"/>
           </a:solidFill>
@@ -3254,8 +2901,8 @@
           <a:cs typeface="+mn-cs"/>
         </a:defRPr>
       </a:lvl4pPr>
-      <a:lvl5pPr marL="1828800" algn="l" defTabSz="914400" rtl="0" eaLnBrk="1" latinLnBrk="0" hangingPunct="1">
-        <a:defRPr sz="1800" kern="1200">
+      <a:lvl5pPr marL="1097280" algn="l" defTabSz="548640" rtl="0" eaLnBrk="1" latinLnBrk="0" hangingPunct="1">
+        <a:defRPr sz="1080" kern="1200">
           <a:solidFill>
             <a:schemeClr val="tx1"/>
           </a:solidFill>
@@ -3264,8 +2911,8 @@
           <a:cs typeface="+mn-cs"/>
         </a:defRPr>
       </a:lvl5pPr>
-      <a:lvl6pPr marL="2286000" algn="l" defTabSz="914400" rtl="0" eaLnBrk="1" latinLnBrk="0" hangingPunct="1">
-        <a:defRPr sz="1800" kern="1200">
+      <a:lvl6pPr marL="1371600" algn="l" defTabSz="548640" rtl="0" eaLnBrk="1" latinLnBrk="0" hangingPunct="1">
+        <a:defRPr sz="1080" kern="1200">
           <a:solidFill>
             <a:schemeClr val="tx1"/>
           </a:solidFill>
@@ -3274,8 +2921,8 @@
           <a:cs typeface="+mn-cs"/>
         </a:defRPr>
       </a:lvl6pPr>
-      <a:lvl7pPr marL="2743200" algn="l" defTabSz="914400" rtl="0" eaLnBrk="1" latinLnBrk="0" hangingPunct="1">
-        <a:defRPr sz="1800" kern="1200">
+      <a:lvl7pPr marL="1645920" algn="l" defTabSz="548640" rtl="0" eaLnBrk="1" latinLnBrk="0" hangingPunct="1">
+        <a:defRPr sz="1080" kern="1200">
           <a:solidFill>
             <a:schemeClr val="tx1"/>
           </a:solidFill>
@@ -3284,8 +2931,8 @@
           <a:cs typeface="+mn-cs"/>
         </a:defRPr>
       </a:lvl7pPr>
-      <a:lvl8pPr marL="3200400" algn="l" defTabSz="914400" rtl="0" eaLnBrk="1" latinLnBrk="0" hangingPunct="1">
-        <a:defRPr sz="1800" kern="1200">
+      <a:lvl8pPr marL="1920240" algn="l" defTabSz="548640" rtl="0" eaLnBrk="1" latinLnBrk="0" hangingPunct="1">
+        <a:defRPr sz="1080" kern="1200">
           <a:solidFill>
             <a:schemeClr val="tx1"/>
           </a:solidFill>
@@ -3294,8 +2941,8 @@
           <a:cs typeface="+mn-cs"/>
         </a:defRPr>
       </a:lvl8pPr>
-      <a:lvl9pPr marL="3657600" algn="l" defTabSz="914400" rtl="0" eaLnBrk="1" latinLnBrk="0" hangingPunct="1">
-        <a:defRPr sz="1800" kern="1200">
+      <a:lvl9pPr marL="2194560" algn="l" defTabSz="548640" rtl="0" eaLnBrk="1" latinLnBrk="0" hangingPunct="1">
+        <a:defRPr sz="1080" kern="1200">
           <a:solidFill>
             <a:schemeClr val="tx1"/>
           </a:solidFill>
@@ -3342,7 +2989,7 @@
         </p:nvSpPr>
         <p:spPr>
           <a:xfrm>
-            <a:off x="220929" y="1190561"/>
+            <a:off x="214595" y="122028"/>
             <a:ext cx="3933761" cy="3845783"/>
           </a:xfrm>
           <a:prstGeom prst="rect">
@@ -3394,7 +3041,7 @@
         </p:nvSpPr>
         <p:spPr>
           <a:xfrm>
-            <a:off x="404532" y="1227822"/>
+            <a:off x="398198" y="159287"/>
             <a:ext cx="3566553" cy="338554"/>
           </a:xfrm>
           <a:prstGeom prst="rect">
@@ -3433,7 +3080,7 @@
         </p:nvSpPr>
         <p:spPr>
           <a:xfrm>
-            <a:off x="1864523" y="3730230"/>
+            <a:off x="1858189" y="2661695"/>
             <a:ext cx="1728787" cy="735806"/>
           </a:xfrm>
           <a:prstGeom prst="roundRect">
@@ -3551,7 +3198,7 @@
         </p:nvSpPr>
         <p:spPr>
           <a:xfrm>
-            <a:off x="1864523" y="2045493"/>
+            <a:off x="1858189" y="976958"/>
             <a:ext cx="1728787" cy="735806"/>
           </a:xfrm>
           <a:prstGeom prst="roundRect">
@@ -3662,7 +3309,7 @@
         </p:blipFill>
         <p:spPr>
           <a:xfrm>
-            <a:off x="300357" y="2096082"/>
+            <a:off x="294023" y="1027549"/>
             <a:ext cx="635209" cy="635209"/>
           </a:xfrm>
           <a:prstGeom prst="rect">
@@ -3698,7 +3345,7 @@
         </p:blipFill>
         <p:spPr>
           <a:xfrm rot="10800000">
-            <a:off x="867094" y="2096081"/>
+            <a:off x="860760" y="1027548"/>
             <a:ext cx="635209" cy="635209"/>
           </a:xfrm>
           <a:prstGeom prst="rect">
@@ -3720,7 +3367,7 @@
         </p:nvSpPr>
         <p:spPr>
           <a:xfrm>
-            <a:off x="499796" y="1942191"/>
+            <a:off x="493460" y="873658"/>
             <a:ext cx="800100" cy="307777"/>
           </a:xfrm>
           <a:prstGeom prst="rect">
@@ -3759,7 +3406,7 @@
         </p:nvSpPr>
         <p:spPr>
           <a:xfrm>
-            <a:off x="434171" y="2577403"/>
+            <a:off x="427837" y="1508870"/>
             <a:ext cx="1002789" cy="307777"/>
           </a:xfrm>
           <a:prstGeom prst="rect">
@@ -3798,7 +3445,7 @@
         </p:nvSpPr>
         <p:spPr>
           <a:xfrm>
-            <a:off x="142973" y="3308137"/>
+            <a:off x="136639" y="2239604"/>
             <a:ext cx="1600733" cy="307777"/>
           </a:xfrm>
           <a:prstGeom prst="rect">
@@ -3837,7 +3484,7 @@
         </p:nvSpPr>
         <p:spPr>
           <a:xfrm>
-            <a:off x="398451" y="4609589"/>
+            <a:off x="392117" y="3541056"/>
             <a:ext cx="1002789" cy="307777"/>
           </a:xfrm>
           <a:prstGeom prst="rect">
@@ -3879,7 +3526,7 @@
         </p:nvCxnSpPr>
         <p:spPr>
           <a:xfrm>
-            <a:off x="1502303" y="2413396"/>
+            <a:off x="1495967" y="1344861"/>
             <a:ext cx="362220" cy="0"/>
           </a:xfrm>
           <a:prstGeom prst="straightConnector1">
@@ -3936,7 +3583,7 @@
         </p:blipFill>
         <p:spPr>
           <a:xfrm>
-            <a:off x="855740" y="3563065"/>
+            <a:off x="849406" y="2494532"/>
             <a:ext cx="723029" cy="1082301"/>
           </a:xfrm>
           <a:prstGeom prst="rect">
@@ -3972,7 +3619,7 @@
         </p:blipFill>
         <p:spPr>
           <a:xfrm>
-            <a:off x="121808" y="3572945"/>
+            <a:off x="115472" y="2504410"/>
             <a:ext cx="906578" cy="1036644"/>
           </a:xfrm>
           <a:prstGeom prst="rect">
@@ -3998,7 +3645,7 @@
         </p:nvCxnSpPr>
         <p:spPr>
           <a:xfrm flipV="1">
-            <a:off x="1578769" y="4098133"/>
+            <a:off x="1572433" y="3029600"/>
             <a:ext cx="285754" cy="6083"/>
           </a:xfrm>
           <a:prstGeom prst="straightConnector1">
@@ -4042,7 +3689,7 @@
         </p:nvSpPr>
         <p:spPr>
           <a:xfrm>
-            <a:off x="4163381" y="1190560"/>
+            <a:off x="4157045" y="122027"/>
             <a:ext cx="2816064" cy="3845783"/>
           </a:xfrm>
           <a:prstGeom prst="rect">
@@ -4094,7 +3741,7 @@
         </p:nvSpPr>
         <p:spPr>
           <a:xfrm>
-            <a:off x="5052526" y="2047873"/>
+            <a:off x="5046192" y="979338"/>
             <a:ext cx="1552119" cy="735806"/>
           </a:xfrm>
           <a:prstGeom prst="roundRect">
@@ -4170,7 +3817,7 @@
         </p:nvSpPr>
         <p:spPr>
           <a:xfrm>
-            <a:off x="4614590" y="3726059"/>
+            <a:off x="4608256" y="2657524"/>
             <a:ext cx="1552119" cy="735806"/>
           </a:xfrm>
           <a:prstGeom prst="roundRect">
@@ -4246,7 +3893,7 @@
         </p:nvSpPr>
         <p:spPr>
           <a:xfrm>
-            <a:off x="4232646" y="1195880"/>
+            <a:off x="4226312" y="127347"/>
             <a:ext cx="2706773" cy="584775"/>
           </a:xfrm>
           <a:prstGeom prst="rect">
@@ -4287,7 +3934,7 @@
         </p:nvSpPr>
         <p:spPr>
           <a:xfrm>
-            <a:off x="6966285" y="1190559"/>
+            <a:off x="6959951" y="122026"/>
             <a:ext cx="2507455" cy="3845783"/>
           </a:xfrm>
           <a:prstGeom prst="rect">
@@ -4339,7 +3986,7 @@
         </p:nvSpPr>
         <p:spPr>
           <a:xfrm>
-            <a:off x="8066227" y="2192887"/>
+            <a:off x="8059891" y="1124352"/>
             <a:ext cx="1303028" cy="441016"/>
           </a:xfrm>
           <a:prstGeom prst="roundRect">
@@ -4402,7 +4049,7 @@
         </p:nvSpPr>
         <p:spPr>
           <a:xfrm>
-            <a:off x="8066227" y="3874758"/>
+            <a:off x="8059891" y="2806223"/>
             <a:ext cx="1303028" cy="441016"/>
           </a:xfrm>
           <a:prstGeom prst="roundRect">
@@ -4469,7 +4116,7 @@
         </p:nvCxnSpPr>
         <p:spPr>
           <a:xfrm>
-            <a:off x="3593310" y="2413396"/>
+            <a:off x="3586974" y="1344861"/>
             <a:ext cx="1459216" cy="2380"/>
           </a:xfrm>
           <a:prstGeom prst="straightConnector1">
@@ -4515,7 +4162,7 @@
         </p:nvCxnSpPr>
         <p:spPr>
           <a:xfrm flipV="1">
-            <a:off x="3593310" y="4093962"/>
+            <a:off x="3586974" y="3025429"/>
             <a:ext cx="1021280" cy="4171"/>
           </a:xfrm>
           <a:prstGeom prst="straightConnector1">
@@ -4557,7 +4204,7 @@
         </p:nvCxnSpPr>
         <p:spPr>
           <a:xfrm>
-            <a:off x="3843338" y="2413396"/>
+            <a:off x="3837002" y="1344863"/>
             <a:ext cx="0" cy="536973"/>
           </a:xfrm>
           <a:prstGeom prst="line">
@@ -4600,7 +4247,7 @@
         </p:nvCxnSpPr>
         <p:spPr>
           <a:xfrm>
-            <a:off x="3843338" y="3572945"/>
+            <a:off x="3837002" y="2504412"/>
             <a:ext cx="0" cy="515177"/>
           </a:xfrm>
           <a:prstGeom prst="line">
@@ -4644,7 +4291,7 @@
         </p:nvCxnSpPr>
         <p:spPr>
           <a:xfrm flipV="1">
-            <a:off x="3828387" y="2783679"/>
+            <a:off x="3822053" y="1715144"/>
             <a:ext cx="2000199" cy="789266"/>
           </a:xfrm>
           <a:prstGeom prst="bentConnector2">
@@ -4689,7 +4336,7 @@
         </p:nvCxnSpPr>
         <p:spPr>
           <a:xfrm>
-            <a:off x="3843338" y="2950369"/>
+            <a:off x="3837002" y="1881834"/>
             <a:ext cx="1547312" cy="775690"/>
           </a:xfrm>
           <a:prstGeom prst="bentConnector2">
@@ -4745,7 +4392,7 @@
         </p:blipFill>
         <p:spPr>
           <a:xfrm>
-            <a:off x="7180736" y="2127374"/>
+            <a:off x="7174402" y="1058841"/>
             <a:ext cx="556335" cy="572043"/>
           </a:xfrm>
           <a:prstGeom prst="rect">
@@ -4781,7 +4428,7 @@
         </p:blipFill>
         <p:spPr>
           <a:xfrm>
-            <a:off x="7165622" y="3810025"/>
+            <a:off x="7159288" y="2741492"/>
             <a:ext cx="556335" cy="572043"/>
           </a:xfrm>
           <a:prstGeom prst="rect">
@@ -4807,7 +4454,7 @@
         </p:nvCxnSpPr>
         <p:spPr>
           <a:xfrm flipV="1">
-            <a:off x="6604645" y="2413396"/>
+            <a:off x="6598311" y="1344861"/>
             <a:ext cx="576091" cy="2380"/>
           </a:xfrm>
           <a:prstGeom prst="straightConnector1">
@@ -4853,7 +4500,7 @@
         </p:nvCxnSpPr>
         <p:spPr>
           <a:xfrm>
-            <a:off x="6166709" y="4093962"/>
+            <a:off x="6160375" y="3025429"/>
             <a:ext cx="998913" cy="2085"/>
           </a:xfrm>
           <a:prstGeom prst="straightConnector1">
@@ -4899,7 +4546,7 @@
         </p:nvCxnSpPr>
         <p:spPr>
           <a:xfrm flipV="1">
-            <a:off x="7737071" y="2413395"/>
+            <a:off x="7730735" y="1344862"/>
             <a:ext cx="329156" cy="1"/>
           </a:xfrm>
           <a:prstGeom prst="straightConnector1">
@@ -4945,7 +4592,7 @@
         </p:nvCxnSpPr>
         <p:spPr>
           <a:xfrm flipV="1">
-            <a:off x="7721957" y="4095266"/>
+            <a:off x="7715621" y="3026733"/>
             <a:ext cx="344270" cy="781"/>
           </a:xfrm>
           <a:prstGeom prst="straightConnector1">
@@ -4989,7 +4636,7 @@
         </p:nvCxnSpPr>
         <p:spPr>
           <a:xfrm>
-            <a:off x="3845720" y="1942191"/>
+            <a:off x="3839384" y="873658"/>
             <a:ext cx="0" cy="506313"/>
           </a:xfrm>
           <a:prstGeom prst="line">
@@ -5032,7 +4679,7 @@
         </p:nvCxnSpPr>
         <p:spPr>
           <a:xfrm>
-            <a:off x="3843338" y="4103276"/>
+            <a:off x="3837002" y="3034743"/>
             <a:ext cx="0" cy="506313"/>
           </a:xfrm>
           <a:prstGeom prst="line">
@@ -5075,7 +4722,7 @@
         </p:nvCxnSpPr>
         <p:spPr>
           <a:xfrm>
-            <a:off x="3828387" y="1942191"/>
+            <a:off x="3822053" y="873658"/>
             <a:ext cx="3630517" cy="185183"/>
           </a:xfrm>
           <a:prstGeom prst="bentConnector2">
@@ -5119,7 +4766,7 @@
         </p:nvCxnSpPr>
         <p:spPr>
           <a:xfrm flipV="1">
-            <a:off x="3843338" y="4382068"/>
+            <a:off x="3837002" y="3313535"/>
             <a:ext cx="3600452" cy="227521"/>
           </a:xfrm>
           <a:prstGeom prst="bentConnector2">
@@ -5161,7 +4808,7 @@
         </p:nvSpPr>
         <p:spPr>
           <a:xfrm>
-            <a:off x="6892690" y="1174139"/>
+            <a:off x="6886356" y="105605"/>
             <a:ext cx="2706773" cy="584775"/>
           </a:xfrm>
           <a:prstGeom prst="rect">
@@ -5200,7 +4847,7 @@
         </p:nvSpPr>
         <p:spPr>
           <a:xfrm>
-            <a:off x="8246076" y="2654882"/>
+            <a:off x="8239742" y="1586349"/>
             <a:ext cx="1002789" cy="307777"/>
           </a:xfrm>
           <a:prstGeom prst="rect">
@@ -5239,7 +4886,7 @@
         </p:nvSpPr>
         <p:spPr>
           <a:xfrm>
-            <a:off x="8230114" y="4326327"/>
+            <a:off x="8223780" y="3257794"/>
             <a:ext cx="1002789" cy="307777"/>
           </a:xfrm>
           <a:prstGeom prst="rect">
@@ -5280,7 +4927,7 @@
         </p:nvSpPr>
         <p:spPr>
           <a:xfrm>
-            <a:off x="9470681" y="1190558"/>
+            <a:off x="9464347" y="122025"/>
             <a:ext cx="2507455" cy="3845783"/>
           </a:xfrm>
           <a:prstGeom prst="rect">
@@ -5332,7 +4979,7 @@
         </p:nvSpPr>
         <p:spPr>
           <a:xfrm>
-            <a:off x="10543012" y="2279081"/>
+            <a:off x="10536676" y="1210546"/>
             <a:ext cx="1086782" cy="450030"/>
           </a:xfrm>
           <a:prstGeom prst="roundRect">
@@ -5395,7 +5042,7 @@
         </p:nvSpPr>
         <p:spPr>
           <a:xfrm>
-            <a:off x="9367649" y="1183046"/>
+            <a:off x="9361315" y="114511"/>
             <a:ext cx="2706773" cy="338554"/>
           </a:xfrm>
           <a:prstGeom prst="rect">
@@ -5434,7 +5081,7 @@
         </p:nvSpPr>
         <p:spPr>
           <a:xfrm>
-            <a:off x="8934548" y="3045827"/>
+            <a:off x="8928212" y="1977292"/>
             <a:ext cx="1317276" cy="584774"/>
           </a:xfrm>
           <a:prstGeom prst="roundRect">
@@ -5510,7 +5157,7 @@
         </p:nvSpPr>
         <p:spPr>
           <a:xfrm>
-            <a:off x="10244740" y="3572945"/>
+            <a:off x="10238404" y="2504410"/>
             <a:ext cx="1683326" cy="730764"/>
           </a:xfrm>
           <a:prstGeom prst="roundRect">
@@ -5617,7 +5264,7 @@
         </p:nvCxnSpPr>
         <p:spPr>
           <a:xfrm rot="16200000" flipH="1">
-            <a:off x="9164201" y="2616842"/>
+            <a:off x="9157865" y="1548309"/>
             <a:ext cx="632432" cy="225537"/>
           </a:xfrm>
           <a:prstGeom prst="bentConnector3">
@@ -5664,7 +5311,7 @@
         </p:nvCxnSpPr>
         <p:spPr>
           <a:xfrm flipV="1">
-            <a:off x="9369255" y="3630601"/>
+            <a:off x="9362921" y="2562068"/>
             <a:ext cx="223931" cy="464665"/>
           </a:xfrm>
           <a:prstGeom prst="bentConnector2">
@@ -5710,7 +5357,7 @@
         </p:nvCxnSpPr>
         <p:spPr>
           <a:xfrm flipV="1">
-            <a:off x="10251824" y="2504096"/>
+            <a:off x="10245488" y="1435561"/>
             <a:ext cx="291188" cy="834118"/>
           </a:xfrm>
           <a:prstGeom prst="bentConnector3">
@@ -5756,7 +5403,7 @@
         </p:nvCxnSpPr>
         <p:spPr>
           <a:xfrm>
-            <a:off x="11086403" y="2729111"/>
+            <a:off x="11080067" y="1660576"/>
             <a:ext cx="0" cy="843834"/>
           </a:xfrm>
           <a:prstGeom prst="straightConnector1">
@@ -5798,7 +5445,7 @@
         </p:nvSpPr>
         <p:spPr>
           <a:xfrm>
-            <a:off x="10310482" y="1967548"/>
+            <a:off x="10304148" y="899015"/>
             <a:ext cx="1509005" cy="307777"/>
           </a:xfrm>
           <a:prstGeom prst="rect">
@@ -5837,7 +5484,7 @@
         </p:nvSpPr>
         <p:spPr>
           <a:xfrm>
-            <a:off x="10310482" y="4556062"/>
+            <a:off x="10304146" y="3487527"/>
             <a:ext cx="1556214" cy="523220"/>
           </a:xfrm>
           <a:prstGeom prst="rect">
@@ -5880,7 +5527,7 @@
         </p:nvCxnSpPr>
         <p:spPr>
           <a:xfrm>
-            <a:off x="11086403" y="4303709"/>
+            <a:off x="11080067" y="3235176"/>
             <a:ext cx="2186" cy="252353"/>
           </a:xfrm>
           <a:prstGeom prst="straightConnector1">
@@ -5924,7 +5571,7 @@
 <file path=ppt/theme/theme1.xml><?xml version="1.0" encoding="utf-8"?>
 <a:theme xmlns:a="http://schemas.openxmlformats.org/drawingml/2006/main" name="Office Theme">
   <a:themeElements>
-    <a:clrScheme name="Office">
+    <a:clrScheme name="Office Theme">
       <a:dk1>
         <a:sysClr val="windowText" lastClr="000000"/>
       </a:dk1>
@@ -5962,7 +5609,7 @@
         <a:srgbClr val="96607D"/>
       </a:folHlink>
     </a:clrScheme>
-    <a:fontScheme name="Office">
+    <a:fontScheme name="Office Theme">
       <a:majorFont>
         <a:latin typeface="Aptos Display" panose="02110004020202020204"/>
         <a:ea typeface=""/>
@@ -6068,7 +5715,7 @@
         <a:font script="Tfng" typeface="Ebrima"/>
       </a:minorFont>
     </a:fontScheme>
-    <a:fmtScheme name="Office">
+    <a:fmtScheme name="Office Theme">
       <a:fillStyleLst>
         <a:solidFill>
           <a:schemeClr val="phClr"/>
